--- a/cdwc_recommendation_system/presentation_ppt/CDWC_Architecture_Scoring_Flow.pptx
+++ b/cdwc_recommendation_system/presentation_ppt/CDWC_Architecture_Scoring_Flow.pptx
@@ -16,6 +16,7 @@
     <p:sldId id="264" r:id="rId15"/>
     <p:sldId id="265" r:id="rId16"/>
     <p:sldId id="266" r:id="rId17"/>
+    <p:sldId id="267" r:id="rId18"/>
   </p:sldIdLst>
   <p:sldSz cx="12191695" cy="6858000" type="screen4x3"/>
   <p:notesSz cx="6858000" cy="9144000"/>
@@ -3114,7 +3115,7 @@
         </p:nvSpPr>
         <p:spPr>
           <a:xfrm>
-            <a:off x="914400" y="2103120"/>
+            <a:off x="914400" y="1920240"/>
             <a:ext cx="10058400" cy="1097280"/>
           </a:xfrm>
           <a:prstGeom prst="rect">
@@ -3137,7 +3138,7 @@
               </a:defRPr>
             </a:pPr>
             <a:r>
-              <a:t>CDWC Talent Diagnostic Engine</a:t>
+              <a:t>CDWC Diagnostic Engine</a:t>
             </a:r>
           </a:p>
         </p:txBody>
@@ -3150,7 +3151,7 @@
         </p:nvSpPr>
         <p:spPr>
           <a:xfrm>
-            <a:off x="914400" y="3200400"/>
+            <a:off x="914400" y="3017520"/>
             <a:ext cx="10058400" cy="731520"/>
           </a:xfrm>
           <a:prstGeom prst="rect">
@@ -3186,7 +3187,7 @@
         </p:nvSpPr>
         <p:spPr>
           <a:xfrm>
-            <a:off x="914400" y="4297680"/>
+            <a:off x="914400" y="4023360"/>
             <a:ext cx="10058400" cy="548640"/>
           </a:xfrm>
           <a:prstGeom prst="rect">
@@ -3209,7 +3210,43 @@
               </a:defRPr>
             </a:pPr>
             <a:r>
-              <a:t>How the Engine Computes Scores to Answer HOD/GM Questions</a:t>
+              <a:t>How the Engine Turns SMA &amp; TPCP Data into Diagnostic JSON</a:t>
+            </a:r>
+          </a:p>
+        </p:txBody>
+      </p:sp>
+      <p:sp>
+        <p:nvSpPr>
+          <p:cNvPr id="5" name="TextBox 4"/>
+          <p:cNvSpPr txBox="1"/>
+          <p:nvPr/>
+        </p:nvSpPr>
+        <p:spPr>
+          <a:xfrm>
+            <a:off x="914400" y="4754880"/>
+            <a:ext cx="10058400" cy="457200"/>
+          </a:xfrm>
+          <a:prstGeom prst="rect">
+            <a:avLst/>
+          </a:prstGeom>
+          <a:noFill/>
+        </p:spPr>
+        <p:txBody>
+          <a:bodyPr wrap="square">
+            <a:spAutoFit/>
+          </a:bodyPr>
+          <a:lstStyle/>
+          <a:p>
+            <a:pPr algn="ctr">
+              <a:defRPr sz="1300" b="1">
+                <a:solidFill>
+                  <a:srgbClr val="FBBF24"/>
+                </a:solidFill>
+                <a:latin typeface="Calibri"/>
+              </a:defRPr>
+            </a:pPr>
+            <a:r>
+              <a:t>Diagnosis only  ·  Block-level rollups only  ·  Action triage out of scope</a:t>
             </a:r>
           </a:p>
         </p:txBody>
@@ -3307,7 +3344,7 @@
               </a:defRPr>
             </a:pPr>
             <a:r>
-              <a:t>One user question walked through every layer</a:t>
+              <a:t>One user question walked through every layer — engine returns diagnostic JSON</a:t>
             </a:r>
           </a:p>
         </p:txBody>
@@ -3364,7 +3401,7 @@
         <p:spPr>
           <a:xfrm>
             <a:off x="457200" y="1371600"/>
-            <a:ext cx="640080" cy="685800"/>
+            <a:ext cx="640080" cy="621792"/>
           </a:xfrm>
           <a:prstGeom prst="ellipse">
             <a:avLst/>
@@ -3408,7 +3445,7 @@
         </p:nvSpPr>
         <p:spPr>
           <a:xfrm>
-            <a:off x="457200" y="1554480"/>
+            <a:off x="457200" y="1536192"/>
             <a:ext cx="640080" cy="365760"/>
           </a:xfrm>
           <a:prstGeom prst="rect">
@@ -3445,7 +3482,7 @@
         <p:spPr>
           <a:xfrm>
             <a:off x="1280160" y="1371600"/>
-            <a:ext cx="10424160" cy="685800"/>
+            <a:ext cx="10424160" cy="621792"/>
           </a:xfrm>
           <a:prstGeom prst="roundRect">
             <a:avLst/>
@@ -3489,8 +3526,8 @@
         </p:nvSpPr>
         <p:spPr>
           <a:xfrm>
-            <a:off x="1463040" y="1444752"/>
-            <a:ext cx="3200400" cy="274320"/>
+            <a:off x="1463040" y="1426464"/>
+            <a:ext cx="4114800" cy="274320"/>
           </a:xfrm>
           <a:prstGeom prst="rect">
             <a:avLst/>
@@ -3525,8 +3562,8 @@
         </p:nvSpPr>
         <p:spPr>
           <a:xfrm>
-            <a:off x="1463040" y="1719072"/>
-            <a:ext cx="10058400" cy="347472"/>
+            <a:off x="1463040" y="1673352"/>
+            <a:ext cx="10058400" cy="301752"/>
           </a:xfrm>
           <a:prstGeom prst="rect">
             <a:avLst/>
@@ -3540,7 +3577,7 @@
           <a:lstStyle/>
           <a:p>
             <a:pPr algn="l">
-              <a:defRPr sz="1100" b="0">
+              <a:defRPr sz="1050" b="0">
                 <a:solidFill>
                   <a:srgbClr val="1E293B"/>
                 </a:solidFill>
@@ -3552,7 +3589,7 @@
             </a:r>
             <a:br/>
             <a:r>
-              <a:t>still have critical gaps?"</a:t>
+              <a:t>are promotable, and who is falling behind?"</a:t>
             </a:r>
           </a:p>
         </p:txBody>
@@ -3565,8 +3602,8 @@
         </p:nvSpPr>
         <p:spPr>
           <a:xfrm>
-            <a:off x="457200" y="2130552"/>
-            <a:ext cx="640080" cy="685800"/>
+            <a:off x="457200" y="2048256"/>
+            <a:ext cx="640080" cy="621792"/>
           </a:xfrm>
           <a:prstGeom prst="ellipse">
             <a:avLst/>
@@ -3610,7 +3647,7 @@
         </p:nvSpPr>
         <p:spPr>
           <a:xfrm>
-            <a:off x="457200" y="2313432"/>
+            <a:off x="457200" y="2212848"/>
             <a:ext cx="640080" cy="365760"/>
           </a:xfrm>
           <a:prstGeom prst="rect">
@@ -3646,8 +3683,8 @@
         </p:nvSpPr>
         <p:spPr>
           <a:xfrm>
-            <a:off x="1280160" y="2130552"/>
-            <a:ext cx="10424160" cy="685800"/>
+            <a:off x="1280160" y="2048256"/>
+            <a:ext cx="10424160" cy="621792"/>
           </a:xfrm>
           <a:prstGeom prst="roundRect">
             <a:avLst/>
@@ -3691,8 +3728,8 @@
         </p:nvSpPr>
         <p:spPr>
           <a:xfrm>
-            <a:off x="1463040" y="2203704"/>
-            <a:ext cx="3200400" cy="274320"/>
+            <a:off x="1463040" y="2103120"/>
+            <a:ext cx="4114800" cy="274320"/>
           </a:xfrm>
           <a:prstGeom prst="rect">
             <a:avLst/>
@@ -3727,8 +3764,8 @@
         </p:nvSpPr>
         <p:spPr>
           <a:xfrm>
-            <a:off x="1463040" y="2478024"/>
-            <a:ext cx="10058400" cy="347472"/>
+            <a:off x="1463040" y="2350008"/>
+            <a:ext cx="10058400" cy="301752"/>
           </a:xfrm>
           <a:prstGeom prst="rect">
             <a:avLst/>
@@ -3742,7 +3779,7 @@
           <a:lstStyle/>
           <a:p>
             <a:pPr algn="l">
-              <a:defRPr sz="1100" b="0">
+              <a:defRPr sz="1050" b="0">
                 <a:solidFill>
                   <a:srgbClr val="1E293B"/>
                 </a:solidFill>
@@ -3754,7 +3791,7 @@
             </a:r>
             <a:br/>
             <a:r>
-              <a:t>question_type=critical_gaps, filter=assessment_level:Principal</a:t>
+              <a:t>question_type=promotability+low_performers, filter=assessment_level:Principal</a:t>
             </a:r>
           </a:p>
         </p:txBody>
@@ -3767,8 +3804,8 @@
         </p:nvSpPr>
         <p:spPr>
           <a:xfrm>
-            <a:off x="457200" y="2889504"/>
-            <a:ext cx="640080" cy="685800"/>
+            <a:off x="457200" y="2724912"/>
+            <a:ext cx="640080" cy="621792"/>
           </a:xfrm>
           <a:prstGeom prst="ellipse">
             <a:avLst/>
@@ -3812,7 +3849,7 @@
         </p:nvSpPr>
         <p:spPr>
           <a:xfrm>
-            <a:off x="457200" y="3072384"/>
+            <a:off x="457200" y="2889504"/>
             <a:ext cx="640080" cy="365760"/>
           </a:xfrm>
           <a:prstGeom prst="rect">
@@ -3848,8 +3885,8 @@
         </p:nvSpPr>
         <p:spPr>
           <a:xfrm>
-            <a:off x="1280160" y="2889504"/>
-            <a:ext cx="10424160" cy="685800"/>
+            <a:off x="1280160" y="2724912"/>
+            <a:ext cx="10424160" cy="621792"/>
           </a:xfrm>
           <a:prstGeom prst="roundRect">
             <a:avLst/>
@@ -3893,8 +3930,8 @@
         </p:nvSpPr>
         <p:spPr>
           <a:xfrm>
-            <a:off x="1463040" y="2962656"/>
-            <a:ext cx="3200400" cy="274320"/>
+            <a:off x="1463040" y="2779776"/>
+            <a:ext cx="4114800" cy="274320"/>
           </a:xfrm>
           <a:prstGeom prst="rect">
             <a:avLst/>
@@ -3929,8 +3966,8 @@
         </p:nvSpPr>
         <p:spPr>
           <a:xfrm>
-            <a:off x="1463040" y="3236976"/>
-            <a:ext cx="10058400" cy="347472"/>
+            <a:off x="1463040" y="3026664"/>
+            <a:ext cx="10058400" cy="301752"/>
           </a:xfrm>
           <a:prstGeom prst="rect">
             <a:avLst/>
@@ -3944,7 +3981,7 @@
           <a:lstStyle/>
           <a:p>
             <a:pPr algn="l">
-              <a:defRPr sz="1100" b="0">
+              <a:defRPr sz="1050" b="0">
                 <a:solidFill>
                   <a:srgbClr val="1E293B"/>
                 </a:solidFill>
@@ -3952,7 +3989,7 @@
               </a:defRPr>
             </a:pPr>
             <a:r>
-              <a:t>POST /team/analyze  →  RecommendationEngine.run()</a:t>
+              <a:t>POST /team/analyze  →  Engine.run(scope)</a:t>
             </a:r>
           </a:p>
         </p:txBody>
@@ -3965,8 +4002,206 @@
         </p:nvSpPr>
         <p:spPr>
           <a:xfrm>
-            <a:off x="457200" y="3648456"/>
-            <a:ext cx="640080" cy="685800"/>
+            <a:off x="457200" y="3401568"/>
+            <a:ext cx="640080" cy="621792"/>
+          </a:xfrm>
+          <a:prstGeom prst="ellipse">
+            <a:avLst/>
+          </a:prstGeom>
+          <a:solidFill>
+            <a:srgbClr val="0D9488"/>
+          </a:solidFill>
+          <a:ln w="15875">
+            <a:solidFill>
+              <a:srgbClr val="0D9488"/>
+            </a:solidFill>
+          </a:ln>
+        </p:spPr>
+        <p:style>
+          <a:lnRef idx="1">
+            <a:schemeClr val="accent1"/>
+          </a:lnRef>
+          <a:fillRef idx="3">
+            <a:schemeClr val="accent1"/>
+          </a:fillRef>
+          <a:effectRef idx="2">
+            <a:schemeClr val="accent1"/>
+          </a:effectRef>
+          <a:fontRef idx="minor">
+            <a:schemeClr val="lt1"/>
+          </a:fontRef>
+        </p:style>
+        <p:txBody>
+          <a:bodyPr rtlCol="0" anchor="ctr"/>
+          <a:lstStyle/>
+          <a:p>
+            <a:pPr algn="ctr"/>
+          </a:p>
+        </p:txBody>
+      </p:sp>
+      <p:sp>
+        <p:nvSpPr>
+          <p:cNvPr id="21" name="TextBox 20"/>
+          <p:cNvSpPr txBox="1"/>
+          <p:nvPr/>
+        </p:nvSpPr>
+        <p:spPr>
+          <a:xfrm>
+            <a:off x="457200" y="3566160"/>
+            <a:ext cx="640080" cy="365760"/>
+          </a:xfrm>
+          <a:prstGeom prst="rect">
+            <a:avLst/>
+          </a:prstGeom>
+          <a:noFill/>
+        </p:spPr>
+        <p:txBody>
+          <a:bodyPr wrap="square">
+            <a:spAutoFit/>
+          </a:bodyPr>
+          <a:lstStyle/>
+          <a:p>
+            <a:pPr algn="ctr">
+              <a:defRPr sz="1600" b="1">
+                <a:solidFill>
+                  <a:srgbClr val="FFFFFF"/>
+                </a:solidFill>
+                <a:latin typeface="Calibri"/>
+              </a:defRPr>
+            </a:pPr>
+            <a:r>
+              <a:t>4</a:t>
+            </a:r>
+          </a:p>
+        </p:txBody>
+      </p:sp>
+      <p:sp>
+        <p:nvSpPr>
+          <p:cNvPr id="22" name="Rounded Rectangle 21"/>
+          <p:cNvSpPr/>
+          <p:nvPr/>
+        </p:nvSpPr>
+        <p:spPr>
+          <a:xfrm>
+            <a:off x="1280160" y="3401568"/>
+            <a:ext cx="10424160" cy="621792"/>
+          </a:xfrm>
+          <a:prstGeom prst="roundRect">
+            <a:avLst/>
+          </a:prstGeom>
+          <a:solidFill>
+            <a:srgbClr val="CCFBF1"/>
+          </a:solidFill>
+          <a:ln w="15875">
+            <a:solidFill>
+              <a:srgbClr val="0D9488"/>
+            </a:solidFill>
+          </a:ln>
+        </p:spPr>
+        <p:style>
+          <a:lnRef idx="1">
+            <a:schemeClr val="accent1"/>
+          </a:lnRef>
+          <a:fillRef idx="3">
+            <a:schemeClr val="accent1"/>
+          </a:fillRef>
+          <a:effectRef idx="2">
+            <a:schemeClr val="accent1"/>
+          </a:effectRef>
+          <a:fontRef idx="minor">
+            <a:schemeClr val="lt1"/>
+          </a:fontRef>
+        </p:style>
+        <p:txBody>
+          <a:bodyPr rtlCol="0" anchor="ctr"/>
+          <a:lstStyle/>
+          <a:p>
+            <a:pPr algn="ctr"/>
+          </a:p>
+        </p:txBody>
+      </p:sp>
+      <p:sp>
+        <p:nvSpPr>
+          <p:cNvPr id="23" name="TextBox 22"/>
+          <p:cNvSpPr txBox="1"/>
+          <p:nvPr/>
+        </p:nvSpPr>
+        <p:spPr>
+          <a:xfrm>
+            <a:off x="1463040" y="3456432"/>
+            <a:ext cx="4114800" cy="274320"/>
+          </a:xfrm>
+          <a:prstGeom prst="rect">
+            <a:avLst/>
+          </a:prstGeom>
+          <a:noFill/>
+        </p:spPr>
+        <p:txBody>
+          <a:bodyPr wrap="square">
+            <a:spAutoFit/>
+          </a:bodyPr>
+          <a:lstStyle/>
+          <a:p>
+            <a:pPr algn="l">
+              <a:defRPr sz="1200" b="1">
+                <a:solidFill>
+                  <a:srgbClr val="1E293B"/>
+                </a:solidFill>
+                <a:latin typeface="Calibri"/>
+              </a:defRPr>
+            </a:pPr>
+            <a:r>
+              <a:t>Engine — load + join</a:t>
+            </a:r>
+          </a:p>
+        </p:txBody>
+      </p:sp>
+      <p:sp>
+        <p:nvSpPr>
+          <p:cNvPr id="24" name="TextBox 23"/>
+          <p:cNvSpPr txBox="1"/>
+          <p:nvPr/>
+        </p:nvSpPr>
+        <p:spPr>
+          <a:xfrm>
+            <a:off x="1463040" y="3703320"/>
+            <a:ext cx="10058400" cy="301752"/>
+          </a:xfrm>
+          <a:prstGeom prst="rect">
+            <a:avLst/>
+          </a:prstGeom>
+          <a:noFill/>
+        </p:spPr>
+        <p:txBody>
+          <a:bodyPr wrap="square">
+            <a:spAutoFit/>
+          </a:bodyPr>
+          <a:lstStyle/>
+          <a:p>
+            <a:pPr algn="l">
+              <a:defRPr sz="1050" b="0">
+                <a:solidFill>
+                  <a:srgbClr val="1E293B"/>
+                </a:solidFill>
+                <a:latin typeface="Consolas"/>
+              </a:defRPr>
+            </a:pPr>
+            <a:r>
+              <a:t>HRIS ⋈ TPCP full-outer-join on dummy_id; flag has_hris / has_tpcp</a:t>
+            </a:r>
+          </a:p>
+        </p:txBody>
+      </p:sp>
+      <p:sp>
+        <p:nvSpPr>
+          <p:cNvPr id="25" name="Oval 24"/>
+          <p:cNvSpPr/>
+          <p:nvPr/>
+        </p:nvSpPr>
+        <p:spPr>
+          <a:xfrm>
+            <a:off x="457200" y="4078224"/>
+            <a:ext cx="640080" cy="621792"/>
           </a:xfrm>
           <a:prstGeom prst="ellipse">
             <a:avLst/>
@@ -4004,13 +4239,13 @@
       </p:sp>
       <p:sp>
         <p:nvSpPr>
-          <p:cNvPr id="21" name="TextBox 20"/>
+          <p:cNvPr id="26" name="TextBox 25"/>
           <p:cNvSpPr txBox="1"/>
           <p:nvPr/>
         </p:nvSpPr>
         <p:spPr>
           <a:xfrm>
-            <a:off x="457200" y="3831336"/>
+            <a:off x="457200" y="4242816"/>
             <a:ext cx="640080" cy="365760"/>
           </a:xfrm>
           <a:prstGeom prst="rect">
@@ -4033,21 +4268,21 @@
               </a:defRPr>
             </a:pPr>
             <a:r>
-              <a:t>4</a:t>
-            </a:r>
-          </a:p>
-        </p:txBody>
-      </p:sp>
-      <p:sp>
-        <p:nvSpPr>
-          <p:cNvPr id="22" name="Rounded Rectangle 21"/>
+              <a:t>5</a:t>
+            </a:r>
+          </a:p>
+        </p:txBody>
+      </p:sp>
+      <p:sp>
+        <p:nvSpPr>
+          <p:cNvPr id="27" name="Rounded Rectangle 26"/>
           <p:cNvSpPr/>
           <p:nvPr/>
         </p:nvSpPr>
         <p:spPr>
           <a:xfrm>
-            <a:off x="1280160" y="3648456"/>
-            <a:ext cx="10424160" cy="685800"/>
+            <a:off x="1280160" y="4078224"/>
+            <a:ext cx="10424160" cy="621792"/>
           </a:xfrm>
           <a:prstGeom prst="roundRect">
             <a:avLst/>
@@ -4085,14 +4320,14 @@
       </p:sp>
       <p:sp>
         <p:nvSpPr>
-          <p:cNvPr id="23" name="TextBox 22"/>
+          <p:cNvPr id="28" name="TextBox 27"/>
           <p:cNvSpPr txBox="1"/>
           <p:nvPr/>
         </p:nvSpPr>
         <p:spPr>
           <a:xfrm>
-            <a:off x="1463040" y="3721608"/>
-            <a:ext cx="3200400" cy="274320"/>
+            <a:off x="1463040" y="4133088"/>
+            <a:ext cx="4114800" cy="274320"/>
           </a:xfrm>
           <a:prstGeom prst="rect">
             <a:avLst/>
@@ -4121,14 +4356,14 @@
       </p:sp>
       <p:sp>
         <p:nvSpPr>
-          <p:cNvPr id="24" name="TextBox 23"/>
+          <p:cNvPr id="29" name="TextBox 28"/>
           <p:cNvSpPr txBox="1"/>
           <p:nvPr/>
         </p:nvSpPr>
         <p:spPr>
           <a:xfrm>
-            <a:off x="1463040" y="3995928"/>
-            <a:ext cx="10058400" cy="347472"/>
+            <a:off x="1463040" y="4379976"/>
+            <a:ext cx="10058400" cy="301752"/>
           </a:xfrm>
           <a:prstGeom prst="rect">
             <a:avLst/>
@@ -4142,7 +4377,7 @@
           <a:lstStyle/>
           <a:p>
             <a:pPr algn="l">
-              <a:defRPr sz="1100" b="0">
+              <a:defRPr sz="1050" b="0">
                 <a:solidFill>
                   <a:srgbClr val="1E293B"/>
                 </a:solidFill>
@@ -4150,25 +4385,21 @@
               </a:defRPr>
             </a:pPr>
             <a:r>
-              <a:t>HRIS⋈TPCP left-join; keep rows where business/opu/division match</a:t>
-            </a:r>
-            <a:br/>
-            <a:r>
-              <a:t>→ 47 candidates</a:t>
-            </a:r>
-          </a:p>
-        </p:txBody>
-      </p:sp>
-      <p:sp>
-        <p:nvSpPr>
-          <p:cNvPr id="25" name="Oval 24"/>
+              <a:t>Keep rows where business/opu/division match → 47 candidates</a:t>
+            </a:r>
+          </a:p>
+        </p:txBody>
+      </p:sp>
+      <p:sp>
+        <p:nvSpPr>
+          <p:cNvPr id="30" name="Oval 29"/>
           <p:cNvSpPr/>
           <p:nvPr/>
         </p:nvSpPr>
         <p:spPr>
           <a:xfrm>
-            <a:off x="457200" y="4407408"/>
-            <a:ext cx="640080" cy="685800"/>
+            <a:off x="457200" y="4754880"/>
+            <a:ext cx="640080" cy="621792"/>
           </a:xfrm>
           <a:prstGeom prst="ellipse">
             <a:avLst/>
@@ -4206,13 +4437,13 @@
       </p:sp>
       <p:sp>
         <p:nvSpPr>
-          <p:cNvPr id="26" name="TextBox 25"/>
+          <p:cNvPr id="31" name="TextBox 30"/>
           <p:cNvSpPr txBox="1"/>
           <p:nvPr/>
         </p:nvSpPr>
         <p:spPr>
           <a:xfrm>
-            <a:off x="457200" y="4590288"/>
+            <a:off x="457200" y="4919472"/>
             <a:ext cx="640080" cy="365760"/>
           </a:xfrm>
           <a:prstGeom prst="rect">
@@ -4235,21 +4466,21 @@
               </a:defRPr>
             </a:pPr>
             <a:r>
-              <a:t>5</a:t>
-            </a:r>
-          </a:p>
-        </p:txBody>
-      </p:sp>
-      <p:sp>
-        <p:nvSpPr>
-          <p:cNvPr id="27" name="Rounded Rectangle 26"/>
+              <a:t>6</a:t>
+            </a:r>
+          </a:p>
+        </p:txBody>
+      </p:sp>
+      <p:sp>
+        <p:nvSpPr>
+          <p:cNvPr id="32" name="Rounded Rectangle 31"/>
           <p:cNvSpPr/>
           <p:nvPr/>
         </p:nvSpPr>
         <p:spPr>
           <a:xfrm>
-            <a:off x="1280160" y="4407408"/>
-            <a:ext cx="10424160" cy="685800"/>
+            <a:off x="1280160" y="4754880"/>
+            <a:ext cx="10424160" cy="621792"/>
           </a:xfrm>
           <a:prstGeom prst="roundRect">
             <a:avLst/>
@@ -4287,14 +4518,14 @@
       </p:sp>
       <p:sp>
         <p:nvSpPr>
-          <p:cNvPr id="28" name="TextBox 27"/>
+          <p:cNvPr id="33" name="TextBox 32"/>
           <p:cNvSpPr txBox="1"/>
           <p:nvPr/>
         </p:nvSpPr>
         <p:spPr>
           <a:xfrm>
-            <a:off x="1463040" y="4480560"/>
-            <a:ext cx="3200400" cy="274320"/>
+            <a:off x="1463040" y="4809744"/>
+            <a:ext cx="4114800" cy="274320"/>
           </a:xfrm>
           <a:prstGeom prst="rect">
             <a:avLst/>
@@ -4323,14 +4554,14 @@
       </p:sp>
       <p:sp>
         <p:nvSpPr>
-          <p:cNvPr id="29" name="TextBox 28"/>
+          <p:cNvPr id="34" name="TextBox 33"/>
           <p:cNvSpPr txBox="1"/>
           <p:nvPr/>
         </p:nvSpPr>
         <p:spPr>
           <a:xfrm>
-            <a:off x="1463040" y="4754880"/>
-            <a:ext cx="10058400" cy="347472"/>
+            <a:off x="1463040" y="5056632"/>
+            <a:ext cx="10058400" cy="301752"/>
           </a:xfrm>
           <a:prstGeom prst="rect">
             <a:avLst/>
@@ -4344,7 +4575,7 @@
           <a:lstStyle/>
           <a:p>
             <a:pPr algn="l">
-              <a:defRPr sz="1100" b="0">
+              <a:defRPr sz="1050" b="0">
                 <a:solidFill>
                   <a:srgbClr val="1E293B"/>
                 </a:solidFill>
@@ -4352,21 +4583,21 @@
               </a:defRPr>
             </a:pPr>
             <a:r>
-              <a:t>Compute 6 health scores for each of 47 employees</a:t>
-            </a:r>
-          </a:p>
-        </p:txBody>
-      </p:sp>
-      <p:sp>
-        <p:nvSpPr>
-          <p:cNvPr id="30" name="Oval 29"/>
+              <a:t>Compute 5 health scores for each of 47 employees</a:t>
+            </a:r>
+          </a:p>
+        </p:txBody>
+      </p:sp>
+      <p:sp>
+        <p:nvSpPr>
+          <p:cNvPr id="35" name="Oval 34"/>
           <p:cNvSpPr/>
           <p:nvPr/>
         </p:nvSpPr>
         <p:spPr>
           <a:xfrm>
-            <a:off x="457200" y="5166360"/>
-            <a:ext cx="640080" cy="685800"/>
+            <a:off x="457200" y="5431536"/>
+            <a:ext cx="640080" cy="621792"/>
           </a:xfrm>
           <a:prstGeom prst="ellipse">
             <a:avLst/>
@@ -4404,13 +4635,13 @@
       </p:sp>
       <p:sp>
         <p:nvSpPr>
-          <p:cNvPr id="31" name="TextBox 30"/>
+          <p:cNvPr id="36" name="TextBox 35"/>
           <p:cNvSpPr txBox="1"/>
           <p:nvPr/>
         </p:nvSpPr>
         <p:spPr>
           <a:xfrm>
-            <a:off x="457200" y="5349240"/>
+            <a:off x="457200" y="5596128"/>
             <a:ext cx="640080" cy="365760"/>
           </a:xfrm>
           <a:prstGeom prst="rect">
@@ -4433,21 +4664,21 @@
               </a:defRPr>
             </a:pPr>
             <a:r>
-              <a:t>6</a:t>
-            </a:r>
-          </a:p>
-        </p:txBody>
-      </p:sp>
-      <p:sp>
-        <p:nvSpPr>
-          <p:cNvPr id="32" name="Rounded Rectangle 31"/>
+              <a:t>7</a:t>
+            </a:r>
+          </a:p>
+        </p:txBody>
+      </p:sp>
+      <p:sp>
+        <p:nvSpPr>
+          <p:cNvPr id="37" name="Rounded Rectangle 36"/>
           <p:cNvSpPr/>
           <p:nvPr/>
         </p:nvSpPr>
         <p:spPr>
           <a:xfrm>
-            <a:off x="1280160" y="5166360"/>
-            <a:ext cx="10424160" cy="685800"/>
+            <a:off x="1280160" y="5431536"/>
+            <a:ext cx="10424160" cy="621792"/>
           </a:xfrm>
           <a:prstGeom prst="roundRect">
             <a:avLst/>
@@ -4485,14 +4716,14 @@
       </p:sp>
       <p:sp>
         <p:nvSpPr>
-          <p:cNvPr id="33" name="TextBox 32"/>
+          <p:cNvPr id="38" name="TextBox 37"/>
           <p:cNvSpPr txBox="1"/>
           <p:nvPr/>
         </p:nvSpPr>
         <p:spPr>
           <a:xfrm>
-            <a:off x="1463040" y="5239512"/>
-            <a:ext cx="3200400" cy="274320"/>
+            <a:off x="1463040" y="5486400"/>
+            <a:ext cx="4114800" cy="274320"/>
           </a:xfrm>
           <a:prstGeom prst="rect">
             <a:avLst/>
@@ -4521,14 +4752,14 @@
       </p:sp>
       <p:sp>
         <p:nvSpPr>
-          <p:cNvPr id="34" name="TextBox 33"/>
+          <p:cNvPr id="39" name="TextBox 38"/>
           <p:cNvSpPr txBox="1"/>
           <p:nvPr/>
         </p:nvSpPr>
         <p:spPr>
           <a:xfrm>
-            <a:off x="1463040" y="5513832"/>
-            <a:ext cx="10058400" cy="347472"/>
+            <a:off x="1463040" y="5733288"/>
+            <a:ext cx="10058400" cy="301752"/>
           </a:xfrm>
           <a:prstGeom prst="rect">
             <a:avLst/>
@@ -4542,7 +4773,7 @@
           <a:lstStyle/>
           <a:p>
             <a:pPr algn="l">
-              <a:defRPr sz="1100" b="0">
+              <a:defRPr sz="1050" b="0">
                 <a:solidFill>
                   <a:srgbClr val="1E293B"/>
                 </a:solidFill>
@@ -4550,25 +4781,21 @@
               </a:defRPr>
             </a:pPr>
             <a:r>
-              <a:t>Filter: assessment_level=Principal AND combined &lt; 0.6</a:t>
-            </a:r>
-            <a:br/>
-            <a:r>
-              <a:t>→ 5 flagged individuals with gap lists</a:t>
-            </a:r>
-          </a:p>
-        </p:txBody>
-      </p:sp>
-      <p:sp>
-        <p:nvSpPr>
-          <p:cNvPr id="35" name="Oval 34"/>
+              <a:t>Team aggregate + individual drill-down → 3 promotable, 5 low performers</a:t>
+            </a:r>
+          </a:p>
+        </p:txBody>
+      </p:sp>
+      <p:sp>
+        <p:nvSpPr>
+          <p:cNvPr id="40" name="Oval 39"/>
           <p:cNvSpPr/>
           <p:nvPr/>
         </p:nvSpPr>
         <p:spPr>
           <a:xfrm>
-            <a:off x="457200" y="5925312"/>
-            <a:ext cx="640080" cy="685800"/>
+            <a:off x="457200" y="6108192"/>
+            <a:ext cx="640080" cy="621792"/>
           </a:xfrm>
           <a:prstGeom prst="ellipse">
             <a:avLst/>
@@ -4606,13 +4833,13 @@
       </p:sp>
       <p:sp>
         <p:nvSpPr>
-          <p:cNvPr id="36" name="TextBox 35"/>
+          <p:cNvPr id="41" name="TextBox 40"/>
           <p:cNvSpPr txBox="1"/>
           <p:nvPr/>
         </p:nvSpPr>
         <p:spPr>
           <a:xfrm>
-            <a:off x="457200" y="6108192"/>
+            <a:off x="457200" y="6272784"/>
             <a:ext cx="640080" cy="365760"/>
           </a:xfrm>
           <a:prstGeom prst="rect">
@@ -4635,21 +4862,21 @@
               </a:defRPr>
             </a:pPr>
             <a:r>
-              <a:t>7</a:t>
-            </a:r>
-          </a:p>
-        </p:txBody>
-      </p:sp>
-      <p:sp>
-        <p:nvSpPr>
-          <p:cNvPr id="37" name="Rounded Rectangle 36"/>
+              <a:t>8</a:t>
+            </a:r>
+          </a:p>
+        </p:txBody>
+      </p:sp>
+      <p:sp>
+        <p:nvSpPr>
+          <p:cNvPr id="42" name="Rounded Rectangle 41"/>
           <p:cNvSpPr/>
           <p:nvPr/>
         </p:nvSpPr>
         <p:spPr>
           <a:xfrm>
-            <a:off x="1280160" y="5925312"/>
-            <a:ext cx="10424160" cy="685800"/>
+            <a:off x="1280160" y="6108192"/>
+            <a:ext cx="10424160" cy="621792"/>
           </a:xfrm>
           <a:prstGeom prst="roundRect">
             <a:avLst/>
@@ -4687,14 +4914,14 @@
       </p:sp>
       <p:sp>
         <p:nvSpPr>
-          <p:cNvPr id="38" name="TextBox 37"/>
+          <p:cNvPr id="43" name="TextBox 42"/>
           <p:cNvSpPr txBox="1"/>
           <p:nvPr/>
         </p:nvSpPr>
         <p:spPr>
           <a:xfrm>
-            <a:off x="1463040" y="5998464"/>
-            <a:ext cx="3200400" cy="274320"/>
+            <a:off x="1463040" y="6163056"/>
+            <a:ext cx="4114800" cy="274320"/>
           </a:xfrm>
           <a:prstGeom prst="rect">
             <a:avLst/>
@@ -4723,14 +4950,14 @@
       </p:sp>
       <p:sp>
         <p:nvSpPr>
-          <p:cNvPr id="39" name="TextBox 38"/>
+          <p:cNvPr id="44" name="TextBox 43"/>
           <p:cNvSpPr txBox="1"/>
           <p:nvPr/>
         </p:nvSpPr>
         <p:spPr>
           <a:xfrm>
-            <a:off x="1463040" y="6272784"/>
-            <a:ext cx="10058400" cy="347472"/>
+            <a:off x="1463040" y="6409944"/>
+            <a:ext cx="10058400" cy="301752"/>
           </a:xfrm>
           <a:prstGeom prst="rect">
             <a:avLst/>
@@ -4744,7 +4971,7 @@
           <a:lstStyle/>
           <a:p>
             <a:pPr algn="l">
-              <a:defRPr sz="1100" b="0">
+              <a:defRPr sz="1050" b="0">
                 <a:solidFill>
                   <a:srgbClr val="1E293B"/>
                 </a:solidFill>
@@ -4752,7 +4979,7 @@
               </a:defRPr>
             </a:pPr>
             <a:r>
-              <a:t>{"flagged":[...]} → "5 of your 12 principals fall below 0.6. Top gaps: k3, p2, e1."</a:t>
+              <a:t>{"individual_drill_down":{...}} → "3 of your principals are promotable; 5 fall below 0.50."</a:t>
             </a:r>
           </a:p>
         </p:txBody>
@@ -4814,14 +5041,50 @@
               </a:defRPr>
             </a:pPr>
             <a:r>
-              <a:t>Summary — Architecture &amp; Scoring Flow</a:t>
-            </a:r>
-          </a:p>
-        </p:txBody>
-      </p:sp>
-      <p:sp>
-        <p:nvSpPr>
-          <p:cNvPr id="3" name="Rounded Rectangle 2"/>
+              <a:t>Out of Scope</a:t>
+            </a:r>
+          </a:p>
+        </p:txBody>
+      </p:sp>
+      <p:sp>
+        <p:nvSpPr>
+          <p:cNvPr id="3" name="TextBox 2"/>
+          <p:cNvSpPr txBox="1"/>
+          <p:nvPr/>
+        </p:nvSpPr>
+        <p:spPr>
+          <a:xfrm>
+            <a:off x="457200" y="822960"/>
+            <a:ext cx="11247120" cy="365760"/>
+          </a:xfrm>
+          <a:prstGeom prst="rect">
+            <a:avLst/>
+          </a:prstGeom>
+          <a:noFill/>
+        </p:spPr>
+        <p:txBody>
+          <a:bodyPr wrap="square">
+            <a:spAutoFit/>
+          </a:bodyPr>
+          <a:lstStyle/>
+          <a:p>
+            <a:pPr algn="l">
+              <a:defRPr sz="1300" b="0">
+                <a:solidFill>
+                  <a:srgbClr val="64748B"/>
+                </a:solidFill>
+                <a:latin typeface="Calibri"/>
+              </a:defRPr>
+            </a:pPr>
+            <a:r>
+              <a:t>Two explicit descopes: per-cell competency analysis and action triage</a:t>
+            </a:r>
+          </a:p>
+        </p:txBody>
+      </p:sp>
+      <p:sp>
+        <p:nvSpPr>
+          <p:cNvPr id="4" name="Rounded Rectangle 3"/>
           <p:cNvSpPr/>
           <p:nvPr/>
         </p:nvSpPr>
@@ -4864,6 +5127,835 @@
       </p:sp>
       <p:sp>
         <p:nvSpPr>
+          <p:cNvPr id="5" name="Rounded Rectangle 4"/>
+          <p:cNvSpPr/>
+          <p:nvPr/>
+        </p:nvSpPr>
+        <p:spPr>
+          <a:xfrm>
+            <a:off x="457200" y="1554480"/>
+            <a:ext cx="5486400" cy="4846320"/>
+          </a:xfrm>
+          <a:prstGeom prst="roundRect">
+            <a:avLst/>
+          </a:prstGeom>
+          <a:solidFill>
+            <a:srgbClr val="FEE2E2"/>
+          </a:solidFill>
+          <a:ln w="15875">
+            <a:solidFill>
+              <a:srgbClr val="DC2626"/>
+            </a:solidFill>
+          </a:ln>
+        </p:spPr>
+        <p:style>
+          <a:lnRef idx="1">
+            <a:schemeClr val="accent1"/>
+          </a:lnRef>
+          <a:fillRef idx="3">
+            <a:schemeClr val="accent1"/>
+          </a:fillRef>
+          <a:effectRef idx="2">
+            <a:schemeClr val="accent1"/>
+          </a:effectRef>
+          <a:fontRef idx="minor">
+            <a:schemeClr val="lt1"/>
+          </a:fontRef>
+        </p:style>
+        <p:txBody>
+          <a:bodyPr rtlCol="0" anchor="ctr"/>
+          <a:lstStyle/>
+          <a:p>
+            <a:pPr algn="ctr"/>
+          </a:p>
+        </p:txBody>
+      </p:sp>
+      <p:sp>
+        <p:nvSpPr>
+          <p:cNvPr id="6" name="TextBox 5"/>
+          <p:cNvSpPr txBox="1"/>
+          <p:nvPr/>
+        </p:nvSpPr>
+        <p:spPr>
+          <a:xfrm>
+            <a:off x="640080" y="1645920"/>
+            <a:ext cx="5120640" cy="365760"/>
+          </a:xfrm>
+          <a:prstGeom prst="rect">
+            <a:avLst/>
+          </a:prstGeom>
+          <a:noFill/>
+        </p:spPr>
+        <p:txBody>
+          <a:bodyPr wrap="square">
+            <a:spAutoFit/>
+          </a:bodyPr>
+          <a:lstStyle/>
+          <a:p>
+            <a:pPr algn="l">
+              <a:defRPr sz="1400" b="1">
+                <a:solidFill>
+                  <a:srgbClr val="DC2626"/>
+                </a:solidFill>
+                <a:latin typeface="Calibri"/>
+              </a:defRPr>
+            </a:pPr>
+            <a:r>
+              <a:t>PER-CELL COMPETENCY — DROPPED</a:t>
+            </a:r>
+          </a:p>
+        </p:txBody>
+      </p:sp>
+      <p:sp>
+        <p:nvSpPr>
+          <p:cNvPr id="7" name="TextBox 6"/>
+          <p:cNvSpPr txBox="1"/>
+          <p:nvPr/>
+        </p:nvSpPr>
+        <p:spPr>
+          <a:xfrm>
+            <a:off x="731520" y="2103120"/>
+            <a:ext cx="5029200" cy="4206240"/>
+          </a:xfrm>
+          <a:prstGeom prst="rect">
+            <a:avLst/>
+          </a:prstGeom>
+          <a:noFill/>
+        </p:spPr>
+        <p:txBody>
+          <a:bodyPr wrap="square">
+            <a:spAutoFit/>
+          </a:bodyPr>
+          <a:lstStyle/>
+          <a:p>
+            <a:pPr>
+              <a:spcAft>
+                <a:spcPts val="400"/>
+              </a:spcAft>
+              <a:defRPr sz="1100">
+                <a:solidFill>
+                  <a:srgbClr val="1E293B"/>
+                </a:solidFill>
+                <a:latin typeface="Calibri"/>
+              </a:defRPr>
+            </a:pPr>
+            <a:r>
+              <a:t>Engine does NOT consume these TPCP fields:</a:t>
+            </a:r>
+          </a:p>
+          <a:p>
+            <a:pPr>
+              <a:spcAft>
+                <a:spcPts val="400"/>
+              </a:spcAft>
+              <a:defRPr sz="1100">
+                <a:solidFill>
+                  <a:srgbClr val="1E293B"/>
+                </a:solidFill>
+                <a:latin typeface="Calibri"/>
+              </a:defRPr>
+            </a:pPr>
+            <a:r>
+              <a:t>  • b1..b25, b110 (Base cells)</a:t>
+            </a:r>
+          </a:p>
+          <a:p>
+            <a:pPr>
+              <a:spcAft>
+                <a:spcPts val="400"/>
+              </a:spcAft>
+              <a:defRPr sz="1100">
+                <a:solidFill>
+                  <a:srgbClr val="1E293B"/>
+                </a:solidFill>
+                <a:latin typeface="Calibri"/>
+              </a:defRPr>
+            </a:pPr>
+            <a:r>
+              <a:t>  • k1..k15, k135 (Key cells)</a:t>
+            </a:r>
+          </a:p>
+          <a:p>
+            <a:pPr>
+              <a:spcAft>
+                <a:spcPts val="400"/>
+              </a:spcAft>
+              <a:defRPr sz="1100">
+                <a:solidFill>
+                  <a:srgbClr val="1E293B"/>
+                </a:solidFill>
+                <a:latin typeface="Calibri"/>
+              </a:defRPr>
+            </a:pPr>
+            <a:r>
+              <a:t>  • p1..p10, p150 (Pacing cells)</a:t>
+            </a:r>
+          </a:p>
+          <a:p>
+            <a:pPr>
+              <a:spcAft>
+                <a:spcPts val="400"/>
+              </a:spcAft>
+              <a:defRPr sz="1100">
+                <a:solidFill>
+                  <a:srgbClr val="1E293B"/>
+                </a:solidFill>
+                <a:latin typeface="Calibri"/>
+              </a:defRPr>
+            </a:pPr>
+            <a:r>
+              <a:t>  • e1..e10, e160 (Emerging cells)</a:t>
+            </a:r>
+          </a:p>
+          <a:p>
+            <a:pPr>
+              <a:spcAft>
+                <a:spcPts val="400"/>
+              </a:spcAft>
+              <a:defRPr sz="1100">
+                <a:solidFill>
+                  <a:srgbClr val="1E293B"/>
+                </a:solidFill>
+                <a:latin typeface="Calibri"/>
+              </a:defRPr>
+            </a:pPr>
+          </a:p>
+          <a:p>
+            <a:pPr>
+              <a:spcAft>
+                <a:spcPts val="400"/>
+              </a:spcAft>
+              <a:defRPr sz="1100">
+                <a:solidFill>
+                  <a:srgbClr val="1E293B"/>
+                </a:solidFill>
+                <a:latin typeface="Calibri"/>
+              </a:defRPr>
+            </a:pPr>
+            <a:r>
+              <a:t>Dropped outputs:</a:t>
+            </a:r>
+          </a:p>
+          <a:p>
+            <a:pPr>
+              <a:spcAft>
+                <a:spcPts val="400"/>
+              </a:spcAft>
+              <a:defRPr sz="1100">
+                <a:solidFill>
+                  <a:srgbClr val="1E293B"/>
+                </a:solidFill>
+                <a:latin typeface="Calibri"/>
+              </a:defRPr>
+            </a:pPr>
+            <a:r>
+              <a:t>  • gap_matrix (cells / repeat_gaps)</a:t>
+            </a:r>
+          </a:p>
+          <a:p>
+            <a:pPr>
+              <a:spcAft>
+                <a:spcPts val="400"/>
+              </a:spcAft>
+              <a:defRPr sz="1100">
+                <a:solidFill>
+                  <a:srgbClr val="1E293B"/>
+                </a:solidFill>
+                <a:latin typeface="Calibri"/>
+              </a:defRPr>
+            </a:pPr>
+            <a:r>
+              <a:t>  • critical_gap_score per employee</a:t>
+            </a:r>
+          </a:p>
+          <a:p>
+            <a:pPr>
+              <a:spcAft>
+                <a:spcPts val="400"/>
+              </a:spcAft>
+              <a:defRPr sz="1100">
+                <a:solidFill>
+                  <a:srgbClr val="1E293B"/>
+                </a:solidFill>
+                <a:latin typeface="Calibri"/>
+              </a:defRPr>
+            </a:pPr>
+            <a:r>
+              <a:t>  • weakest_cells per employee</a:t>
+            </a:r>
+          </a:p>
+          <a:p>
+            <a:pPr>
+              <a:spcAft>
+                <a:spcPts val="400"/>
+              </a:spcAft>
+              <a:defRPr sz="1100">
+                <a:solidFill>
+                  <a:srgbClr val="1E293B"/>
+                </a:solidFill>
+                <a:latin typeface="Calibri"/>
+              </a:defRPr>
+            </a:pPr>
+            <a:r>
+              <a:t>  • structural / mixed / people labels</a:t>
+            </a:r>
+          </a:p>
+          <a:p>
+            <a:pPr>
+              <a:spcAft>
+                <a:spcPts val="400"/>
+              </a:spcAft>
+              <a:defRPr sz="1100">
+                <a:solidFill>
+                  <a:srgbClr val="1E293B"/>
+                </a:solidFill>
+                <a:latin typeface="Calibri"/>
+              </a:defRPr>
+            </a:pPr>
+          </a:p>
+          <a:p>
+            <a:pPr>
+              <a:spcAft>
+                <a:spcPts val="400"/>
+              </a:spcAft>
+              <a:defRPr sz="1100">
+                <a:solidFill>
+                  <a:srgbClr val="1E293B"/>
+                </a:solidFill>
+                <a:latin typeface="Calibri"/>
+              </a:defRPr>
+            </a:pPr>
+            <a:r>
+              <a:t>Surviving TPCP signal:</a:t>
+            </a:r>
+          </a:p>
+          <a:p>
+            <a:pPr>
+              <a:spcAft>
+                <a:spcPts val="400"/>
+              </a:spcAft>
+              <a:defRPr sz="1100">
+                <a:solidFill>
+                  <a:srgbClr val="1E293B"/>
+                </a:solidFill>
+                <a:latin typeface="Calibri"/>
+              </a:defRPr>
+            </a:pPr>
+            <a:r>
+              <a:t>  • base_pct, key_pct, pacing_pct,</a:t>
+            </a:r>
+          </a:p>
+          <a:p>
+            <a:pPr>
+              <a:spcAft>
+                <a:spcPts val="400"/>
+              </a:spcAft>
+              <a:defRPr sz="1100">
+                <a:solidFill>
+                  <a:srgbClr val="1E293B"/>
+                </a:solidFill>
+                <a:latin typeface="Calibri"/>
+              </a:defRPr>
+            </a:pPr>
+            <a:r>
+              <a:t>    emerging_pct, cti_met_pct</a:t>
+            </a:r>
+          </a:p>
+          <a:p>
+            <a:pPr>
+              <a:spcAft>
+                <a:spcPts val="400"/>
+              </a:spcAft>
+              <a:defRPr sz="1100">
+                <a:solidFill>
+                  <a:srgbClr val="1E293B"/>
+                </a:solidFill>
+                <a:latin typeface="Calibri"/>
+              </a:defRPr>
+            </a:pPr>
+            <a:r>
+              <a:t>  • team_aggregate.weakest_dimension</a:t>
+            </a:r>
+          </a:p>
+        </p:txBody>
+      </p:sp>
+      <p:sp>
+        <p:nvSpPr>
+          <p:cNvPr id="8" name="Rounded Rectangle 7"/>
+          <p:cNvSpPr/>
+          <p:nvPr/>
+        </p:nvSpPr>
+        <p:spPr>
+          <a:xfrm>
+            <a:off x="6217920" y="1554480"/>
+            <a:ext cx="5486400" cy="4846320"/>
+          </a:xfrm>
+          <a:prstGeom prst="roundRect">
+            <a:avLst/>
+          </a:prstGeom>
+          <a:solidFill>
+            <a:srgbClr val="FEE2E2"/>
+          </a:solidFill>
+          <a:ln w="15875">
+            <a:solidFill>
+              <a:srgbClr val="DC2626"/>
+            </a:solidFill>
+          </a:ln>
+        </p:spPr>
+        <p:style>
+          <a:lnRef idx="1">
+            <a:schemeClr val="accent1"/>
+          </a:lnRef>
+          <a:fillRef idx="3">
+            <a:schemeClr val="accent1"/>
+          </a:fillRef>
+          <a:effectRef idx="2">
+            <a:schemeClr val="accent1"/>
+          </a:effectRef>
+          <a:fontRef idx="minor">
+            <a:schemeClr val="lt1"/>
+          </a:fontRef>
+        </p:style>
+        <p:txBody>
+          <a:bodyPr rtlCol="0" anchor="ctr"/>
+          <a:lstStyle/>
+          <a:p>
+            <a:pPr algn="ctr"/>
+          </a:p>
+        </p:txBody>
+      </p:sp>
+      <p:sp>
+        <p:nvSpPr>
+          <p:cNvPr id="9" name="TextBox 8"/>
+          <p:cNvSpPr txBox="1"/>
+          <p:nvPr/>
+        </p:nvSpPr>
+        <p:spPr>
+          <a:xfrm>
+            <a:off x="6400800" y="1645920"/>
+            <a:ext cx="5120640" cy="365760"/>
+          </a:xfrm>
+          <a:prstGeom prst="rect">
+            <a:avLst/>
+          </a:prstGeom>
+          <a:noFill/>
+        </p:spPr>
+        <p:txBody>
+          <a:bodyPr wrap="square">
+            <a:spAutoFit/>
+          </a:bodyPr>
+          <a:lstStyle/>
+          <a:p>
+            <a:pPr algn="l">
+              <a:defRPr sz="1400" b="1">
+                <a:solidFill>
+                  <a:srgbClr val="DC2626"/>
+                </a:solidFill>
+                <a:latin typeface="Calibri"/>
+              </a:defRPr>
+            </a:pPr>
+            <a:r>
+              <a:t>ACTION RECOMMENDATIONS — DEFERRED</a:t>
+            </a:r>
+          </a:p>
+        </p:txBody>
+      </p:sp>
+      <p:sp>
+        <p:nvSpPr>
+          <p:cNvPr id="10" name="TextBox 9"/>
+          <p:cNvSpPr txBox="1"/>
+          <p:nvPr/>
+        </p:nvSpPr>
+        <p:spPr>
+          <a:xfrm>
+            <a:off x="6400800" y="2103120"/>
+            <a:ext cx="5120640" cy="4206240"/>
+          </a:xfrm>
+          <a:prstGeom prst="rect">
+            <a:avLst/>
+          </a:prstGeom>
+          <a:noFill/>
+        </p:spPr>
+        <p:txBody>
+          <a:bodyPr wrap="square">
+            <a:spAutoFit/>
+          </a:bodyPr>
+          <a:lstStyle/>
+          <a:p>
+            <a:pPr>
+              <a:spcAft>
+                <a:spcPts val="400"/>
+              </a:spcAft>
+              <a:defRPr sz="1100">
+                <a:solidFill>
+                  <a:srgbClr val="1E293B"/>
+                </a:solidFill>
+                <a:latin typeface="Calibri"/>
+              </a:defRPr>
+            </a:pPr>
+            <a:r>
+              <a:t>Engine does NOT emit:</a:t>
+            </a:r>
+          </a:p>
+          <a:p>
+            <a:pPr>
+              <a:spcAft>
+                <a:spcPts val="400"/>
+              </a:spcAft>
+              <a:defRPr sz="1100">
+                <a:solidFill>
+                  <a:srgbClr val="1E293B"/>
+                </a:solidFill>
+                <a:latin typeface="Calibri"/>
+              </a:defRPr>
+            </a:pPr>
+            <a:r>
+              <a:t>  • actions field in Engine_Response</a:t>
+            </a:r>
+          </a:p>
+          <a:p>
+            <a:pPr>
+              <a:spcAft>
+                <a:spcPts val="400"/>
+              </a:spcAft>
+              <a:defRPr sz="1100">
+                <a:solidFill>
+                  <a:srgbClr val="1E293B"/>
+                </a:solidFill>
+                <a:latin typeface="Calibri"/>
+              </a:defRPr>
+            </a:pPr>
+            <a:r>
+              <a:t>  • training / exposure / hiring objects</a:t>
+            </a:r>
+          </a:p>
+          <a:p>
+            <a:pPr>
+              <a:spcAft>
+                <a:spcPts val="400"/>
+              </a:spcAft>
+              <a:defRPr sz="1100">
+                <a:solidFill>
+                  <a:srgbClr val="1E293B"/>
+                </a:solidFill>
+                <a:latin typeface="Calibri"/>
+              </a:defRPr>
+            </a:pPr>
+            <a:r>
+              <a:t>  • priority or horizon_months fields</a:t>
+            </a:r>
+          </a:p>
+          <a:p>
+            <a:pPr>
+              <a:spcAft>
+                <a:spcPts val="400"/>
+              </a:spcAft>
+              <a:defRPr sz="1100">
+                <a:solidFill>
+                  <a:srgbClr val="1E293B"/>
+                </a:solidFill>
+                <a:latin typeface="Calibri"/>
+              </a:defRPr>
+            </a:pPr>
+            <a:r>
+              <a:t>  • senior-coverage hiring signal</a:t>
+            </a:r>
+          </a:p>
+          <a:p>
+            <a:pPr>
+              <a:spcAft>
+                <a:spcPts val="400"/>
+              </a:spcAft>
+              <a:defRPr sz="1100">
+                <a:solidFill>
+                  <a:srgbClr val="1E293B"/>
+                </a:solidFill>
+                <a:latin typeface="Calibri"/>
+              </a:defRPr>
+            </a:pPr>
+          </a:p>
+          <a:p>
+            <a:pPr>
+              <a:spcAft>
+                <a:spcPts val="400"/>
+              </a:spcAft>
+              <a:defRPr sz="1100">
+                <a:solidFill>
+                  <a:srgbClr val="1E293B"/>
+                </a:solidFill>
+                <a:latin typeface="Calibri"/>
+              </a:defRPr>
+            </a:pPr>
+            <a:r>
+              <a:t>Questions deferred to a future layer:</a:t>
+            </a:r>
+          </a:p>
+          <a:p>
+            <a:pPr>
+              <a:spcAft>
+                <a:spcPts val="400"/>
+              </a:spcAft>
+              <a:defRPr sz="1100">
+                <a:solidFill>
+                  <a:srgbClr val="1E293B"/>
+                </a:solidFill>
+                <a:latin typeface="Calibri"/>
+              </a:defRPr>
+            </a:pPr>
+            <a:r>
+              <a:t>  • What actions to close these gaps?</a:t>
+            </a:r>
+          </a:p>
+          <a:p>
+            <a:pPr>
+              <a:spcAft>
+                <a:spcPts val="400"/>
+              </a:spcAft>
+              <a:defRPr sz="1100">
+                <a:solidFill>
+                  <a:srgbClr val="1E293B"/>
+                </a:solidFill>
+                <a:latin typeface="Calibri"/>
+              </a:defRPr>
+            </a:pPr>
+            <a:r>
+              <a:t>  • Training, exposure, or hiring?</a:t>
+            </a:r>
+          </a:p>
+          <a:p>
+            <a:pPr>
+              <a:spcAft>
+                <a:spcPts val="400"/>
+              </a:spcAft>
+              <a:defRPr sz="1100">
+                <a:solidFill>
+                  <a:srgbClr val="1E293B"/>
+                </a:solidFill>
+                <a:latin typeface="Calibri"/>
+              </a:defRPr>
+            </a:pPr>
+            <a:r>
+              <a:t>  • Which intervention gives highest</a:t>
+            </a:r>
+          </a:p>
+          <a:p>
+            <a:pPr>
+              <a:spcAft>
+                <a:spcPts val="400"/>
+              </a:spcAft>
+              <a:defRPr sz="1100">
+                <a:solidFill>
+                  <a:srgbClr val="1E293B"/>
+                </a:solidFill>
+                <a:latin typeface="Calibri"/>
+              </a:defRPr>
+            </a:pPr>
+            <a:r>
+              <a:t>    impact?</a:t>
+            </a:r>
+          </a:p>
+          <a:p>
+            <a:pPr>
+              <a:spcAft>
+                <a:spcPts val="400"/>
+              </a:spcAft>
+              <a:defRPr sz="1100">
+                <a:solidFill>
+                  <a:srgbClr val="1E293B"/>
+                </a:solidFill>
+                <a:latin typeface="Calibri"/>
+              </a:defRPr>
+            </a:pPr>
+            <a:r>
+              <a:t>  • What's realistic in 6–12 months?</a:t>
+            </a:r>
+          </a:p>
+          <a:p>
+            <a:pPr>
+              <a:spcAft>
+                <a:spcPts val="400"/>
+              </a:spcAft>
+              <a:defRPr sz="1100">
+                <a:solidFill>
+                  <a:srgbClr val="1E293B"/>
+                </a:solidFill>
+                <a:latin typeface="Calibri"/>
+              </a:defRPr>
+            </a:pPr>
+          </a:p>
+          <a:p>
+            <a:pPr>
+              <a:spcAft>
+                <a:spcPts val="400"/>
+              </a:spcAft>
+              <a:defRPr sz="1100">
+                <a:solidFill>
+                  <a:srgbClr val="1E293B"/>
+                </a:solidFill>
+                <a:latin typeface="Calibri"/>
+              </a:defRPr>
+            </a:pPr>
+            <a:r>
+              <a:t>Downstream triage can still read the</a:t>
+            </a:r>
+          </a:p>
+          <a:p>
+            <a:pPr>
+              <a:spcAft>
+                <a:spcPts val="400"/>
+              </a:spcAft>
+              <a:defRPr sz="1100">
+                <a:solidFill>
+                  <a:srgbClr val="1E293B"/>
+                </a:solidFill>
+                <a:latin typeface="Calibri"/>
+              </a:defRPr>
+            </a:pPr>
+            <a:r>
+              <a:t>diagnostic JSON (team_aggregate +</a:t>
+            </a:r>
+          </a:p>
+          <a:p>
+            <a:pPr>
+              <a:spcAft>
+                <a:spcPts val="400"/>
+              </a:spcAft>
+              <a:defRPr sz="1100">
+                <a:solidFill>
+                  <a:srgbClr val="1E293B"/>
+                </a:solidFill>
+                <a:latin typeface="Calibri"/>
+              </a:defRPr>
+            </a:pPr>
+            <a:r>
+              <a:t>individual_drill_down) and apply its</a:t>
+            </a:r>
+          </a:p>
+          <a:p>
+            <a:pPr>
+              <a:spcAft>
+                <a:spcPts val="400"/>
+              </a:spcAft>
+              <a:defRPr sz="1100">
+                <a:solidFill>
+                  <a:srgbClr val="1E293B"/>
+                </a:solidFill>
+                <a:latin typeface="Calibri"/>
+              </a:defRPr>
+            </a:pPr>
+            <a:r>
+              <a:t>own rules.</a:t>
+            </a:r>
+          </a:p>
+        </p:txBody>
+      </p:sp>
+    </p:spTree>
+  </p:cSld>
+  <p:clrMapOvr>
+    <a:masterClrMapping/>
+  </p:clrMapOvr>
+</p:sld>
+</file>
+
+<file path=ppt/slides/slide12.xml><?xml version="1.0" encoding="utf-8"?>
+<p:sld xmlns:a="http://schemas.openxmlformats.org/drawingml/2006/main" xmlns:p="http://schemas.openxmlformats.org/presentationml/2006/main" xmlns:r="http://schemas.openxmlformats.org/officeDocument/2006/relationships">
+  <p:cSld>
+    <p:bg>
+      <p:bgPr>
+        <a:solidFill>
+          <a:srgbClr val="FFFFFF"/>
+        </a:solidFill>
+        <a:effectLst/>
+      </p:bgPr>
+    </p:bg>
+    <p:spTree>
+      <p:nvGrpSpPr>
+        <p:cNvPr id="1" name=""/>
+        <p:cNvGrpSpPr/>
+        <p:nvPr/>
+      </p:nvGrpSpPr>
+      <p:grpSpPr/>
+      <p:sp>
+        <p:nvSpPr>
+          <p:cNvPr id="2" name="TextBox 1"/>
+          <p:cNvSpPr txBox="1"/>
+          <p:nvPr/>
+        </p:nvSpPr>
+        <p:spPr>
+          <a:xfrm>
+            <a:off x="457200" y="274320"/>
+            <a:ext cx="11247120" cy="594360"/>
+          </a:xfrm>
+          <a:prstGeom prst="rect">
+            <a:avLst/>
+          </a:prstGeom>
+          <a:noFill/>
+        </p:spPr>
+        <p:txBody>
+          <a:bodyPr wrap="square">
+            <a:spAutoFit/>
+          </a:bodyPr>
+          <a:lstStyle/>
+          <a:p>
+            <a:pPr algn="l">
+              <a:defRPr sz="2600" b="1">
+                <a:solidFill>
+                  <a:srgbClr val="1E293B"/>
+                </a:solidFill>
+                <a:latin typeface="Calibri"/>
+              </a:defRPr>
+            </a:pPr>
+            <a:r>
+              <a:t>Summary — Architecture &amp; Scoring Flow</a:t>
+            </a:r>
+          </a:p>
+        </p:txBody>
+      </p:sp>
+      <p:sp>
+        <p:nvSpPr>
+          <p:cNvPr id="3" name="Rounded Rectangle 2"/>
+          <p:cNvSpPr/>
+          <p:nvPr/>
+        </p:nvSpPr>
+        <p:spPr>
+          <a:xfrm>
+            <a:off x="457200" y="1188720"/>
+            <a:ext cx="548640" cy="45720"/>
+          </a:xfrm>
+          <a:prstGeom prst="roundRect">
+            <a:avLst/>
+          </a:prstGeom>
+          <a:solidFill>
+            <a:srgbClr val="2563EB"/>
+          </a:solidFill>
+          <a:ln>
+            <a:noFill/>
+          </a:ln>
+        </p:spPr>
+        <p:style>
+          <a:lnRef idx="1">
+            <a:schemeClr val="accent1"/>
+          </a:lnRef>
+          <a:fillRef idx="3">
+            <a:schemeClr val="accent1"/>
+          </a:fillRef>
+          <a:effectRef idx="2">
+            <a:schemeClr val="accent1"/>
+          </a:effectRef>
+          <a:fontRef idx="minor">
+            <a:schemeClr val="lt1"/>
+          </a:fontRef>
+        </p:style>
+        <p:txBody>
+          <a:bodyPr rtlCol="0" anchor="ctr"/>
+          <a:lstStyle/>
+          <a:p>
+            <a:pPr algn="ctr"/>
+          </a:p>
+        </p:txBody>
+      </p:sp>
+      <p:sp>
+        <p:nvSpPr>
           <p:cNvPr id="4" name="TextBox 3"/>
           <p:cNvSpPr txBox="1"/>
           <p:nvPr/>
@@ -4912,7 +6004,7 @@
               </a:defRPr>
             </a:pPr>
             <a:r>
-              <a:t>• Engine consumes 2 files (HRIS + TPCP), left-joined on dummy_id</a:t>
+              <a:t>• Engine consumes 2 files (HRIS + TPCP), full-outer-joined on dummy_id</a:t>
             </a:r>
           </a:p>
           <a:p>
@@ -4928,7 +6020,7 @@
               </a:defRPr>
             </a:pPr>
             <a:r>
-              <a:t>• Engine pipeline: scope filter → per-person scoring → analysis → insight triage</a:t>
+              <a:t>• 4-stage engine pipeline: load+join → scope filter → per-person scoring → analysis</a:t>
             </a:r>
           </a:p>
           <a:p>
@@ -4944,7 +6036,7 @@
               </a:defRPr>
             </a:pPr>
             <a:r>
-              <a:t>• 6 health scores per employee — all deterministic, all in 0–1 range</a:t>
+              <a:t>• 5 health scores per employee — all deterministic, all in 0–1 range</a:t>
             </a:r>
           </a:p>
           <a:p>
@@ -4960,7 +6052,7 @@
               </a:defRPr>
             </a:pPr>
             <a:r>
-              <a:t>• 3 parallel analyses answer different question types (team / gaps / individuals)</a:t>
+              <a:t>• 2 parallel analyses: team aggregate + individual drill-down</a:t>
             </a:r>
           </a:p>
           <a:p>
@@ -4976,7 +6068,7 @@
               </a:defRPr>
             </a:pPr>
             <a:r>
-              <a:t>• Insight engine applies explicit rules to emit structured actions</a:t>
+              <a:t>• TPCP input restricted to block-level rollups (base/key/pacing/emerging %, cti_met %)</a:t>
             </a:r>
           </a:p>
           <a:p>
@@ -4992,7 +6084,7 @@
               </a:defRPr>
             </a:pPr>
             <a:r>
-              <a:t>• Engine emits PURE JSON; conversation layer handles the narrative framing</a:t>
+              <a:t>• Engine stops at diagnosis — action triage is explicitly out of scope</a:t>
             </a:r>
           </a:p>
           <a:p>
@@ -5008,7 +6100,23 @@
               </a:defRPr>
             </a:pPr>
             <a:r>
-              <a:t>• Every output is traceable back to raw HRIS and TPCP fields</a:t>
+              <a:t>• Engine emits PURE JSON; conversation layer handles narrative framing</a:t>
+            </a:r>
+          </a:p>
+          <a:p>
+            <a:pPr>
+              <a:spcAft>
+                <a:spcPts val="400"/>
+              </a:spcAft>
+              <a:defRPr sz="1600">
+                <a:solidFill>
+                  <a:srgbClr val="1E293B"/>
+                </a:solidFill>
+                <a:latin typeface="Calibri"/>
+              </a:defRPr>
+            </a:pPr>
+            <a:r>
+              <a:t>• Every output is traceable back to raw HRIS and TPCP rollup fields</a:t>
             </a:r>
           </a:p>
         </p:txBody>
@@ -5089,7 +6197,7 @@
               </a:defRPr>
             </a:pPr>
             <a:r>
-              <a:t>Rule-based · Deterministic · Explainable · No labeled data needed · Conversation-ready JSON</a:t>
+              <a:t>Rule-based · Deterministic · Explainable · No labeled data needed · Conversation-ready diagnostic JSON</a:t>
             </a:r>
           </a:p>
         </p:txBody>
@@ -5187,7 +6295,7 @@
               </a:defRPr>
             </a:pPr>
             <a:r>
-              <a:t>From HOD/GM question → to data sources → to scoring → to JSON insights</a:t>
+              <a:t>From HOD/GM question → to data sources → to scoring → to diagnostic JSON</a:t>
             </a:r>
           </a:p>
         </p:txBody>
@@ -5554,7 +6662,7 @@
               </a:defRPr>
             </a:pPr>
             <a:r>
-              <a:t>④ ENGINE LAYER   ·   join → scope → score → analyze → insight  (PURE JSON OUT)</a:t>
+              <a:t>④ ENGINE LAYER   ·   join → scope → score → analyze   (PURE JSON OUT — DIAGNOSIS ONLY)</a:t>
             </a:r>
           </a:p>
         </p:txBody>
@@ -5815,7 +6923,7 @@
               </a:defRPr>
             </a:pPr>
             <a:r>
-              <a:t>Engine layer never formats prose. It always emits structured JSON which the conversation layer converts into narrative.</a:t>
+              <a:t>Engine layer never formats prose. It emits structured diagnostic JSON; action recommendations are handled by a separate future layer.</a:t>
             </a:r>
           </a:p>
         </p:txBody>
@@ -5913,7 +7021,7 @@
               </a:defRPr>
             </a:pPr>
             <a:r>
-              <a:t>Two source files, left-join on dummy_id → unified employee record</a:t>
+              <a:t>Two source files, full-outer-join on dummy_id → unified employee record</a:t>
             </a:r>
           </a:p>
         </p:txBody>
@@ -6444,7 +7552,7 @@
               </a:defRPr>
             </a:pPr>
             <a:r>
-              <a:t>• 110+ competency cells  (b1..b25, k1..k15, p1..p10, e1..e10)</a:t>
+              <a:t>• assessment_date   (per-cell b/k/p/e fields NOT consumed)</a:t>
             </a:r>
           </a:p>
         </p:txBody>
@@ -6597,7 +7705,7 @@
               </a:defRPr>
             </a:pPr>
             <a:r>
-              <a:t>LEFT JOIN</a:t>
+              <a:t>FULL JOIN</a:t>
             </a:r>
           </a:p>
         </p:txBody>
@@ -6753,7 +7861,7 @@
               </a:defRPr>
             </a:pPr>
             <a:r>
-              <a:t>977 employees with BOTH files (full signal)  ·  8,477 HRIS-only (scored on CBS, zero on TPCP)  ·  41 TPCP-only (edge case)</a:t>
+              <a:t>has_hris + has_tpcp flags preserved — BOTH (full signal)  ·  HRIS-only (CBS only)  ·  TPCP-only (edge case)</a:t>
             </a:r>
           </a:p>
           <a:p>
@@ -6769,7 +7877,7 @@
               </a:defRPr>
             </a:pPr>
             <a:r>
-              <a:t>Each record carries identity + org hierarchy + CBS block + TPCP block + competency cells ready for scoring.</a:t>
+              <a:t>Each record carries identity + org hierarchy + CBS block + TPCP rollups (base/key/pacing/emerging %, cti_met %).</a:t>
             </a:r>
           </a:p>
         </p:txBody>
@@ -6831,7 +7939,7 @@
               </a:defRPr>
             </a:pPr>
             <a:r>
-              <a:t>Engine Pipeline — 4 Stages</a:t>
+              <a:t>Engine Pipeline — 4 Stages (Diagnosis Only)</a:t>
             </a:r>
           </a:p>
         </p:txBody>
@@ -6867,7 +7975,7 @@
               </a:defRPr>
             </a:pPr>
             <a:r>
-              <a:t>Every query flows through these stages; outputs are pure JSON</a:t>
+              <a:t>Every query flows through these stages; outputs are pure diagnostic JSON</a:t>
             </a:r>
           </a:p>
         </p:txBody>
@@ -6924,6 +8032,252 @@
         <p:spPr>
           <a:xfrm>
             <a:off x="457200" y="1554480"/>
+            <a:ext cx="2651760" cy="2926080"/>
+          </a:xfrm>
+          <a:prstGeom prst="roundRect">
+            <a:avLst/>
+          </a:prstGeom>
+          <a:solidFill>
+            <a:srgbClr val="CCFBF1"/>
+          </a:solidFill>
+          <a:ln w="15875">
+            <a:solidFill>
+              <a:srgbClr val="0D9488"/>
+            </a:solidFill>
+          </a:ln>
+        </p:spPr>
+        <p:style>
+          <a:lnRef idx="1">
+            <a:schemeClr val="accent1"/>
+          </a:lnRef>
+          <a:fillRef idx="3">
+            <a:schemeClr val="accent1"/>
+          </a:fillRef>
+          <a:effectRef idx="2">
+            <a:schemeClr val="accent1"/>
+          </a:effectRef>
+          <a:fontRef idx="minor">
+            <a:schemeClr val="lt1"/>
+          </a:fontRef>
+        </p:style>
+        <p:txBody>
+          <a:bodyPr rtlCol="0" anchor="ctr"/>
+          <a:lstStyle/>
+          <a:p>
+            <a:pPr algn="ctr"/>
+          </a:p>
+        </p:txBody>
+      </p:sp>
+      <p:sp>
+        <p:nvSpPr>
+          <p:cNvPr id="6" name="Oval 5"/>
+          <p:cNvSpPr/>
+          <p:nvPr/>
+        </p:nvSpPr>
+        <p:spPr>
+          <a:xfrm>
+            <a:off x="640080" y="1737360"/>
+            <a:ext cx="457200" cy="457200"/>
+          </a:xfrm>
+          <a:prstGeom prst="ellipse">
+            <a:avLst/>
+          </a:prstGeom>
+          <a:solidFill>
+            <a:srgbClr val="0D9488"/>
+          </a:solidFill>
+          <a:ln w="15875">
+            <a:solidFill>
+              <a:srgbClr val="0D9488"/>
+            </a:solidFill>
+          </a:ln>
+        </p:spPr>
+        <p:style>
+          <a:lnRef idx="1">
+            <a:schemeClr val="accent1"/>
+          </a:lnRef>
+          <a:fillRef idx="3">
+            <a:schemeClr val="accent1"/>
+          </a:fillRef>
+          <a:effectRef idx="2">
+            <a:schemeClr val="accent1"/>
+          </a:effectRef>
+          <a:fontRef idx="minor">
+            <a:schemeClr val="lt1"/>
+          </a:fontRef>
+        </p:style>
+        <p:txBody>
+          <a:bodyPr rtlCol="0" anchor="ctr"/>
+          <a:lstStyle/>
+          <a:p>
+            <a:pPr algn="ctr"/>
+          </a:p>
+        </p:txBody>
+      </p:sp>
+      <p:sp>
+        <p:nvSpPr>
+          <p:cNvPr id="7" name="TextBox 6"/>
+          <p:cNvSpPr txBox="1"/>
+          <p:nvPr/>
+        </p:nvSpPr>
+        <p:spPr>
+          <a:xfrm>
+            <a:off x="640080" y="1810512"/>
+            <a:ext cx="457200" cy="365760"/>
+          </a:xfrm>
+          <a:prstGeom prst="rect">
+            <a:avLst/>
+          </a:prstGeom>
+          <a:noFill/>
+        </p:spPr>
+        <p:txBody>
+          <a:bodyPr wrap="square">
+            <a:spAutoFit/>
+          </a:bodyPr>
+          <a:lstStyle/>
+          <a:p>
+            <a:pPr algn="ctr">
+              <a:defRPr sz="1400" b="1">
+                <a:solidFill>
+                  <a:srgbClr val="FFFFFF"/>
+                </a:solidFill>
+                <a:latin typeface="Calibri"/>
+              </a:defRPr>
+            </a:pPr>
+            <a:r>
+              <a:t>1</a:t>
+            </a:r>
+          </a:p>
+        </p:txBody>
+      </p:sp>
+      <p:sp>
+        <p:nvSpPr>
+          <p:cNvPr id="8" name="TextBox 7"/>
+          <p:cNvSpPr txBox="1"/>
+          <p:nvPr/>
+        </p:nvSpPr>
+        <p:spPr>
+          <a:xfrm>
+            <a:off x="1234440" y="1810512"/>
+            <a:ext cx="1737360" cy="411480"/>
+          </a:xfrm>
+          <a:prstGeom prst="rect">
+            <a:avLst/>
+          </a:prstGeom>
+          <a:noFill/>
+        </p:spPr>
+        <p:txBody>
+          <a:bodyPr wrap="square">
+            <a:spAutoFit/>
+          </a:bodyPr>
+          <a:lstStyle/>
+          <a:p>
+            <a:pPr algn="l">
+              <a:defRPr sz="1600" b="1">
+                <a:solidFill>
+                  <a:srgbClr val="1E293B"/>
+                </a:solidFill>
+                <a:latin typeface="Calibri"/>
+              </a:defRPr>
+            </a:pPr>
+            <a:r>
+              <a:t>Load &amp; Join</a:t>
+            </a:r>
+          </a:p>
+        </p:txBody>
+      </p:sp>
+      <p:sp>
+        <p:nvSpPr>
+          <p:cNvPr id="9" name="TextBox 8"/>
+          <p:cNvSpPr txBox="1"/>
+          <p:nvPr/>
+        </p:nvSpPr>
+        <p:spPr>
+          <a:xfrm>
+            <a:off x="685800" y="2468880"/>
+            <a:ext cx="2194560" cy="1920240"/>
+          </a:xfrm>
+          <a:prstGeom prst="rect">
+            <a:avLst/>
+          </a:prstGeom>
+          <a:noFill/>
+        </p:spPr>
+        <p:txBody>
+          <a:bodyPr wrap="square">
+            <a:spAutoFit/>
+          </a:bodyPr>
+          <a:lstStyle/>
+          <a:p>
+            <a:pPr algn="l">
+              <a:defRPr sz="1200" b="0">
+                <a:solidFill>
+                  <a:srgbClr val="1E293B"/>
+                </a:solidFill>
+                <a:latin typeface="Calibri"/>
+              </a:defRPr>
+            </a:pPr>
+            <a:r>
+              <a:t>Ingest HRIS + TPCP.</a:t>
+            </a:r>
+            <a:br/>
+            <a:r>
+              <a:t>Full-outer-join on</a:t>
+            </a:r>
+            <a:br/>
+            <a:r>
+              <a:t>dummy_id. Flag each</a:t>
+            </a:r>
+            <a:br/>
+            <a:r>
+              <a:t>record has_hris / has_tpcp.</a:t>
+            </a:r>
+          </a:p>
+        </p:txBody>
+      </p:sp>
+      <p:sp>
+        <p:nvSpPr>
+          <p:cNvPr id="10" name="TextBox 9"/>
+          <p:cNvSpPr txBox="1"/>
+          <p:nvPr/>
+        </p:nvSpPr>
+        <p:spPr>
+          <a:xfrm>
+            <a:off x="3108960" y="2834640"/>
+            <a:ext cx="228600" cy="365760"/>
+          </a:xfrm>
+          <a:prstGeom prst="rect">
+            <a:avLst/>
+          </a:prstGeom>
+          <a:noFill/>
+        </p:spPr>
+        <p:txBody>
+          <a:bodyPr wrap="square">
+            <a:spAutoFit/>
+          </a:bodyPr>
+          <a:lstStyle/>
+          <a:p>
+            <a:pPr algn="ctr">
+              <a:defRPr sz="2200" b="1">
+                <a:solidFill>
+                  <a:srgbClr val="64748B"/>
+                </a:solidFill>
+                <a:latin typeface="Calibri"/>
+              </a:defRPr>
+            </a:pPr>
+            <a:r>
+              <a:t>→</a:t>
+            </a:r>
+          </a:p>
+        </p:txBody>
+      </p:sp>
+      <p:sp>
+        <p:nvSpPr>
+          <p:cNvPr id="11" name="Rounded Rectangle 10"/>
+          <p:cNvSpPr/>
+          <p:nvPr/>
+        </p:nvSpPr>
+        <p:spPr>
+          <a:xfrm>
+            <a:off x="3337560" y="1554480"/>
             <a:ext cx="2651760" cy="2926080"/>
           </a:xfrm>
           <a:prstGeom prst="roundRect">
@@ -6962,13 +8316,13 @@
       </p:sp>
       <p:sp>
         <p:nvSpPr>
-          <p:cNvPr id="6" name="Oval 5"/>
+          <p:cNvPr id="12" name="Oval 11"/>
           <p:cNvSpPr/>
           <p:nvPr/>
         </p:nvSpPr>
         <p:spPr>
           <a:xfrm>
-            <a:off x="640080" y="1737360"/>
+            <a:off x="3520440" y="1737360"/>
             <a:ext cx="457200" cy="457200"/>
           </a:xfrm>
           <a:prstGeom prst="ellipse">
@@ -7007,13 +8361,13 @@
       </p:sp>
       <p:sp>
         <p:nvSpPr>
-          <p:cNvPr id="7" name="TextBox 6"/>
+          <p:cNvPr id="13" name="TextBox 12"/>
           <p:cNvSpPr txBox="1"/>
           <p:nvPr/>
         </p:nvSpPr>
         <p:spPr>
           <a:xfrm>
-            <a:off x="640080" y="1810512"/>
+            <a:off x="3520440" y="1810512"/>
             <a:ext cx="457200" cy="365760"/>
           </a:xfrm>
           <a:prstGeom prst="rect">
@@ -7036,20 +8390,20 @@
               </a:defRPr>
             </a:pPr>
             <a:r>
-              <a:t>1</a:t>
-            </a:r>
-          </a:p>
-        </p:txBody>
-      </p:sp>
-      <p:sp>
-        <p:nvSpPr>
-          <p:cNvPr id="8" name="TextBox 7"/>
+              <a:t>2</a:t>
+            </a:r>
+          </a:p>
+        </p:txBody>
+      </p:sp>
+      <p:sp>
+        <p:nvSpPr>
+          <p:cNvPr id="14" name="TextBox 13"/>
           <p:cNvSpPr txBox="1"/>
           <p:nvPr/>
         </p:nvSpPr>
         <p:spPr>
           <a:xfrm>
-            <a:off x="1234440" y="1810512"/>
+            <a:off x="4114800" y="1810512"/>
             <a:ext cx="1737360" cy="411480"/>
           </a:xfrm>
           <a:prstGeom prst="rect">
@@ -7079,13 +8433,13 @@
       </p:sp>
       <p:sp>
         <p:nvSpPr>
-          <p:cNvPr id="9" name="TextBox 8"/>
+          <p:cNvPr id="15" name="TextBox 14"/>
           <p:cNvSpPr txBox="1"/>
           <p:nvPr/>
         </p:nvSpPr>
         <p:spPr>
           <a:xfrm>
-            <a:off x="685800" y="2468880"/>
+            <a:off x="3566160" y="2468880"/>
             <a:ext cx="2194560" cy="1920240"/>
           </a:xfrm>
           <a:prstGeom prst="rect">
@@ -7116,20 +8470,24 @@
             </a:r>
             <a:br/>
             <a:r>
-              <a:t>Resulting team = candidate pool.</a:t>
-            </a:r>
-          </a:p>
-        </p:txBody>
-      </p:sp>
-      <p:sp>
-        <p:nvSpPr>
-          <p:cNvPr id="10" name="TextBox 9"/>
+              <a:t>Resulting team = scoped</a:t>
+            </a:r>
+            <a:br/>
+            <a:r>
+              <a:t>pool. Signal, not gate.</a:t>
+            </a:r>
+          </a:p>
+        </p:txBody>
+      </p:sp>
+      <p:sp>
+        <p:nvSpPr>
+          <p:cNvPr id="16" name="TextBox 15"/>
           <p:cNvSpPr txBox="1"/>
           <p:nvPr/>
         </p:nvSpPr>
         <p:spPr>
           <a:xfrm>
-            <a:off x="3108960" y="2834640"/>
+            <a:off x="5989320" y="2834640"/>
             <a:ext cx="228600" cy="365760"/>
           </a:xfrm>
           <a:prstGeom prst="rect">
@@ -7159,13 +8517,13 @@
       </p:sp>
       <p:sp>
         <p:nvSpPr>
-          <p:cNvPr id="11" name="Rounded Rectangle 10"/>
+          <p:cNvPr id="17" name="Rounded Rectangle 16"/>
           <p:cNvSpPr/>
           <p:nvPr/>
         </p:nvSpPr>
         <p:spPr>
           <a:xfrm>
-            <a:off x="3337560" y="1554480"/>
+            <a:off x="6217920" y="1554480"/>
             <a:ext cx="2651760" cy="2926080"/>
           </a:xfrm>
           <a:prstGeom prst="roundRect">
@@ -7204,13 +8562,13 @@
       </p:sp>
       <p:sp>
         <p:nvSpPr>
-          <p:cNvPr id="12" name="Oval 11"/>
+          <p:cNvPr id="18" name="Oval 17"/>
           <p:cNvSpPr/>
           <p:nvPr/>
         </p:nvSpPr>
         <p:spPr>
           <a:xfrm>
-            <a:off x="3520440" y="1737360"/>
+            <a:off x="6400800" y="1737360"/>
             <a:ext cx="457200" cy="457200"/>
           </a:xfrm>
           <a:prstGeom prst="ellipse">
@@ -7249,13 +8607,13 @@
       </p:sp>
       <p:sp>
         <p:nvSpPr>
-          <p:cNvPr id="13" name="TextBox 12"/>
+          <p:cNvPr id="19" name="TextBox 18"/>
           <p:cNvSpPr txBox="1"/>
           <p:nvPr/>
         </p:nvSpPr>
         <p:spPr>
           <a:xfrm>
-            <a:off x="3520440" y="1810512"/>
+            <a:off x="6400800" y="1810512"/>
             <a:ext cx="457200" cy="365760"/>
           </a:xfrm>
           <a:prstGeom prst="rect">
@@ -7278,20 +8636,20 @@
               </a:defRPr>
             </a:pPr>
             <a:r>
-              <a:t>2</a:t>
-            </a:r>
-          </a:p>
-        </p:txBody>
-      </p:sp>
-      <p:sp>
-        <p:nvSpPr>
-          <p:cNvPr id="14" name="TextBox 13"/>
+              <a:t>3</a:t>
+            </a:r>
+          </a:p>
+        </p:txBody>
+      </p:sp>
+      <p:sp>
+        <p:nvSpPr>
+          <p:cNvPr id="20" name="TextBox 19"/>
           <p:cNvSpPr txBox="1"/>
           <p:nvPr/>
         </p:nvSpPr>
         <p:spPr>
           <a:xfrm>
-            <a:off x="4114800" y="1810512"/>
+            <a:off x="6995160" y="1810512"/>
             <a:ext cx="1737360" cy="411480"/>
           </a:xfrm>
           <a:prstGeom prst="rect">
@@ -7321,13 +8679,13 @@
       </p:sp>
       <p:sp>
         <p:nvSpPr>
-          <p:cNvPr id="15" name="TextBox 14"/>
+          <p:cNvPr id="21" name="TextBox 20"/>
           <p:cNvSpPr txBox="1"/>
           <p:nvPr/>
         </p:nvSpPr>
         <p:spPr>
           <a:xfrm>
-            <a:off x="3566160" y="2468880"/>
+            <a:off x="6446520" y="2468880"/>
             <a:ext cx="2194560" cy="1920240"/>
           </a:xfrm>
           <a:prstGeom prst="rect">
@@ -7350,28 +8708,32 @@
               </a:defRPr>
             </a:pPr>
             <a:r>
-              <a:t>Compute 6 health scores for</a:t>
+              <a:t>Compute 5 health scores</a:t>
             </a:r>
             <a:br/>
             <a:r>
-              <a:t>every employee in pool.</a:t>
+              <a:t>for every scoped employee.</a:t>
             </a:r>
             <a:br/>
             <a:r>
               <a:t>All scores are 0–1.</a:t>
             </a:r>
-          </a:p>
-        </p:txBody>
-      </p:sp>
-      <p:sp>
-        <p:nvSpPr>
-          <p:cNvPr id="16" name="TextBox 15"/>
+            <a:br/>
+            <a:r>
+              <a:t>Fallbacks for missing data.</a:t>
+            </a:r>
+          </a:p>
+        </p:txBody>
+      </p:sp>
+      <p:sp>
+        <p:nvSpPr>
+          <p:cNvPr id="22" name="TextBox 21"/>
           <p:cNvSpPr txBox="1"/>
           <p:nvPr/>
         </p:nvSpPr>
         <p:spPr>
           <a:xfrm>
-            <a:off x="5989320" y="2834640"/>
+            <a:off x="8869680" y="2834640"/>
             <a:ext cx="228600" cy="365760"/>
           </a:xfrm>
           <a:prstGeom prst="rect">
@@ -7401,13 +8763,13 @@
       </p:sp>
       <p:sp>
         <p:nvSpPr>
-          <p:cNvPr id="17" name="Rounded Rectangle 16"/>
+          <p:cNvPr id="23" name="Rounded Rectangle 22"/>
           <p:cNvSpPr/>
           <p:nvPr/>
         </p:nvSpPr>
         <p:spPr>
           <a:xfrm>
-            <a:off x="6217920" y="1554480"/>
+            <a:off x="9098280" y="1554480"/>
             <a:ext cx="2651760" cy="2926080"/>
           </a:xfrm>
           <a:prstGeom prst="roundRect">
@@ -7446,13 +8808,13 @@
       </p:sp>
       <p:sp>
         <p:nvSpPr>
-          <p:cNvPr id="18" name="Oval 17"/>
+          <p:cNvPr id="24" name="Oval 23"/>
           <p:cNvSpPr/>
           <p:nvPr/>
         </p:nvSpPr>
         <p:spPr>
           <a:xfrm>
-            <a:off x="6400800" y="1737360"/>
+            <a:off x="9281160" y="1737360"/>
             <a:ext cx="457200" cy="457200"/>
           </a:xfrm>
           <a:prstGeom prst="ellipse">
@@ -7491,13 +8853,13 @@
       </p:sp>
       <p:sp>
         <p:nvSpPr>
-          <p:cNvPr id="19" name="TextBox 18"/>
+          <p:cNvPr id="25" name="TextBox 24"/>
           <p:cNvSpPr txBox="1"/>
           <p:nvPr/>
         </p:nvSpPr>
         <p:spPr>
           <a:xfrm>
-            <a:off x="6400800" y="1810512"/>
+            <a:off x="9281160" y="1810512"/>
             <a:ext cx="457200" cy="365760"/>
           </a:xfrm>
           <a:prstGeom prst="rect">
@@ -7520,20 +8882,20 @@
               </a:defRPr>
             </a:pPr>
             <a:r>
-              <a:t>3</a:t>
-            </a:r>
-          </a:p>
-        </p:txBody>
-      </p:sp>
-      <p:sp>
-        <p:nvSpPr>
-          <p:cNvPr id="20" name="TextBox 19"/>
+              <a:t>4</a:t>
+            </a:r>
+          </a:p>
+        </p:txBody>
+      </p:sp>
+      <p:sp>
+        <p:nvSpPr>
+          <p:cNvPr id="26" name="TextBox 25"/>
           <p:cNvSpPr txBox="1"/>
           <p:nvPr/>
         </p:nvSpPr>
         <p:spPr>
           <a:xfrm>
-            <a:off x="6995160" y="1810512"/>
+            <a:off x="9875520" y="1810512"/>
             <a:ext cx="1737360" cy="411480"/>
           </a:xfrm>
           <a:prstGeom prst="rect">
@@ -7563,13 +8925,13 @@
       </p:sp>
       <p:sp>
         <p:nvSpPr>
-          <p:cNvPr id="21" name="TextBox 20"/>
+          <p:cNvPr id="27" name="TextBox 26"/>
           <p:cNvSpPr txBox="1"/>
           <p:nvPr/>
         </p:nvSpPr>
         <p:spPr>
           <a:xfrm>
-            <a:off x="6446520" y="2468880"/>
+            <a:off x="9326880" y="2468880"/>
             <a:ext cx="2194560" cy="1920240"/>
           </a:xfrm>
           <a:prstGeom prst="rect">
@@ -7592,7 +8954,7 @@
               </a:defRPr>
             </a:pPr>
             <a:r>
-              <a:t>Run 3 parallel analyses:</a:t>
+              <a:t>Run 2 parallel analyses:</a:t>
             </a:r>
             <a:br/>
             <a:r>
@@ -7600,253 +8962,11 @@
             </a:r>
             <a:br/>
             <a:r>
-              <a:t>• Competency gap matrix</a:t>
+              <a:t>• Individual drill-down</a:t>
             </a:r>
             <a:br/>
             <a:r>
-              <a:t>• Individual drill-down</a:t>
-            </a:r>
-          </a:p>
-        </p:txBody>
-      </p:sp>
-      <p:sp>
-        <p:nvSpPr>
-          <p:cNvPr id="22" name="TextBox 21"/>
-          <p:cNvSpPr txBox="1"/>
-          <p:nvPr/>
-        </p:nvSpPr>
-        <p:spPr>
-          <a:xfrm>
-            <a:off x="8869680" y="2834640"/>
-            <a:ext cx="228600" cy="365760"/>
-          </a:xfrm>
-          <a:prstGeom prst="rect">
-            <a:avLst/>
-          </a:prstGeom>
-          <a:noFill/>
-        </p:spPr>
-        <p:txBody>
-          <a:bodyPr wrap="square">
-            <a:spAutoFit/>
-          </a:bodyPr>
-          <a:lstStyle/>
-          <a:p>
-            <a:pPr algn="ctr">
-              <a:defRPr sz="2200" b="1">
-                <a:solidFill>
-                  <a:srgbClr val="64748B"/>
-                </a:solidFill>
-                <a:latin typeface="Calibri"/>
-              </a:defRPr>
-            </a:pPr>
-            <a:r>
-              <a:t>→</a:t>
-            </a:r>
-          </a:p>
-        </p:txBody>
-      </p:sp>
-      <p:sp>
-        <p:nvSpPr>
-          <p:cNvPr id="23" name="Rounded Rectangle 22"/>
-          <p:cNvSpPr/>
-          <p:nvPr/>
-        </p:nvSpPr>
-        <p:spPr>
-          <a:xfrm>
-            <a:off x="9098280" y="1554480"/>
-            <a:ext cx="2651760" cy="2926080"/>
-          </a:xfrm>
-          <a:prstGeom prst="roundRect">
-            <a:avLst/>
-          </a:prstGeom>
-          <a:solidFill>
-            <a:srgbClr val="D1FAE5"/>
-          </a:solidFill>
-          <a:ln w="15875">
-            <a:solidFill>
-              <a:srgbClr val="059669"/>
-            </a:solidFill>
-          </a:ln>
-        </p:spPr>
-        <p:style>
-          <a:lnRef idx="1">
-            <a:schemeClr val="accent1"/>
-          </a:lnRef>
-          <a:fillRef idx="3">
-            <a:schemeClr val="accent1"/>
-          </a:fillRef>
-          <a:effectRef idx="2">
-            <a:schemeClr val="accent1"/>
-          </a:effectRef>
-          <a:fontRef idx="minor">
-            <a:schemeClr val="lt1"/>
-          </a:fontRef>
-        </p:style>
-        <p:txBody>
-          <a:bodyPr rtlCol="0" anchor="ctr"/>
-          <a:lstStyle/>
-          <a:p>
-            <a:pPr algn="ctr"/>
-          </a:p>
-        </p:txBody>
-      </p:sp>
-      <p:sp>
-        <p:nvSpPr>
-          <p:cNvPr id="24" name="Oval 23"/>
-          <p:cNvSpPr/>
-          <p:nvPr/>
-        </p:nvSpPr>
-        <p:spPr>
-          <a:xfrm>
-            <a:off x="9281160" y="1737360"/>
-            <a:ext cx="457200" cy="457200"/>
-          </a:xfrm>
-          <a:prstGeom prst="ellipse">
-            <a:avLst/>
-          </a:prstGeom>
-          <a:solidFill>
-            <a:srgbClr val="059669"/>
-          </a:solidFill>
-          <a:ln w="15875">
-            <a:solidFill>
-              <a:srgbClr val="059669"/>
-            </a:solidFill>
-          </a:ln>
-        </p:spPr>
-        <p:style>
-          <a:lnRef idx="1">
-            <a:schemeClr val="accent1"/>
-          </a:lnRef>
-          <a:fillRef idx="3">
-            <a:schemeClr val="accent1"/>
-          </a:fillRef>
-          <a:effectRef idx="2">
-            <a:schemeClr val="accent1"/>
-          </a:effectRef>
-          <a:fontRef idx="minor">
-            <a:schemeClr val="lt1"/>
-          </a:fontRef>
-        </p:style>
-        <p:txBody>
-          <a:bodyPr rtlCol="0" anchor="ctr"/>
-          <a:lstStyle/>
-          <a:p>
-            <a:pPr algn="ctr"/>
-          </a:p>
-        </p:txBody>
-      </p:sp>
-      <p:sp>
-        <p:nvSpPr>
-          <p:cNvPr id="25" name="TextBox 24"/>
-          <p:cNvSpPr txBox="1"/>
-          <p:nvPr/>
-        </p:nvSpPr>
-        <p:spPr>
-          <a:xfrm>
-            <a:off x="9281160" y="1810512"/>
-            <a:ext cx="457200" cy="365760"/>
-          </a:xfrm>
-          <a:prstGeom prst="rect">
-            <a:avLst/>
-          </a:prstGeom>
-          <a:noFill/>
-        </p:spPr>
-        <p:txBody>
-          <a:bodyPr wrap="square">
-            <a:spAutoFit/>
-          </a:bodyPr>
-          <a:lstStyle/>
-          <a:p>
-            <a:pPr algn="ctr">
-              <a:defRPr sz="1400" b="1">
-                <a:solidFill>
-                  <a:srgbClr val="FFFFFF"/>
-                </a:solidFill>
-                <a:latin typeface="Calibri"/>
-              </a:defRPr>
-            </a:pPr>
-            <a:r>
-              <a:t>4</a:t>
-            </a:r>
-          </a:p>
-        </p:txBody>
-      </p:sp>
-      <p:sp>
-        <p:nvSpPr>
-          <p:cNvPr id="26" name="TextBox 25"/>
-          <p:cNvSpPr txBox="1"/>
-          <p:nvPr/>
-        </p:nvSpPr>
-        <p:spPr>
-          <a:xfrm>
-            <a:off x="9875520" y="1810512"/>
-            <a:ext cx="1737360" cy="411480"/>
-          </a:xfrm>
-          <a:prstGeom prst="rect">
-            <a:avLst/>
-          </a:prstGeom>
-          <a:noFill/>
-        </p:spPr>
-        <p:txBody>
-          <a:bodyPr wrap="square">
-            <a:spAutoFit/>
-          </a:bodyPr>
-          <a:lstStyle/>
-          <a:p>
-            <a:pPr algn="l">
-              <a:defRPr sz="1600" b="1">
-                <a:solidFill>
-                  <a:srgbClr val="1E293B"/>
-                </a:solidFill>
-                <a:latin typeface="Calibri"/>
-              </a:defRPr>
-            </a:pPr>
-            <a:r>
-              <a:t>Insight Engine</a:t>
-            </a:r>
-          </a:p>
-        </p:txBody>
-      </p:sp>
-      <p:sp>
-        <p:nvSpPr>
-          <p:cNvPr id="27" name="TextBox 26"/>
-          <p:cNvSpPr txBox="1"/>
-          <p:nvPr/>
-        </p:nvSpPr>
-        <p:spPr>
-          <a:xfrm>
-            <a:off x="9326880" y="2468880"/>
-            <a:ext cx="2194560" cy="1920240"/>
-          </a:xfrm>
-          <a:prstGeom prst="rect">
-            <a:avLst/>
-          </a:prstGeom>
-          <a:noFill/>
-        </p:spPr>
-        <p:txBody>
-          <a:bodyPr wrap="square">
-            <a:spAutoFit/>
-          </a:bodyPr>
-          <a:lstStyle/>
-          <a:p>
-            <a:pPr algn="l">
-              <a:defRPr sz="1200" b="0">
-                <a:solidFill>
-                  <a:srgbClr val="1E293B"/>
-                </a:solidFill>
-                <a:latin typeface="Calibri"/>
-              </a:defRPr>
-            </a:pPr>
-            <a:r>
-              <a:t>Rule-based triage:</a:t>
-            </a:r>
-            <a:br/>
-            <a:r>
-              <a:t>training · exposure · hiring.</a:t>
-            </a:r>
-            <a:br/>
-            <a:r>
-              <a:t>Emit structured JSON.</a:t>
+              <a:t>(flags + lists)</a:t>
             </a:r>
           </a:p>
         </p:txBody>
@@ -7966,7 +9086,7 @@
               </a:defRPr>
             </a:pPr>
             <a:r>
-              <a:t>• Stage 2 →  'Who has not completed TPCP?'  'Individual scorecards'  'What is their combined score?'</a:t>
+              <a:t>• Stage 1–2  →  'Who is in my scope?'  'Who has HRIS but no TPCP?'  'Team size after filter?'</a:t>
             </a:r>
           </a:p>
           <a:p>
@@ -7982,7 +9102,7 @@
               </a:defRPr>
             </a:pPr>
             <a:r>
-              <a:t>• Stage 3 →  'Team TPCP performance?'  'Which cells are consistently weak?'  'People vs structural?'</a:t>
+              <a:t>• Stage 3    →  'Who has not completed TPCP?'  'Individual scorecards'  'What is their combined score?'</a:t>
             </a:r>
           </a:p>
           <a:p>
@@ -7998,7 +9118,7 @@
               </a:defRPr>
             </a:pPr>
             <a:r>
-              <a:t>• Stage 4 →  'What actions?'  'Training, exposure, hiring?'  'What to close in 6–12 months?'  'Who is promotable?'</a:t>
+              <a:t>• Stage 4    →  'Team TPCP performance?'  'Which block is weakest?'  'Who is promotable?'  'Who are the low performers?'</a:t>
             </a:r>
           </a:p>
         </p:txBody>
@@ -8060,7 +9180,7 @@
               </a:defRPr>
             </a:pPr>
             <a:r>
-              <a:t>Per-Person Scoring — Inputs to 6 Health Scores</a:t>
+              <a:t>Per-Person Scoring — Inputs to 5 Health Scores</a:t>
             </a:r>
           </a:p>
         </p:txBody>
@@ -8096,7 +9216,7 @@
               </a:defRPr>
             </a:pPr>
             <a:r>
-              <a:t>Each employee becomes a 6-dimensional health vector</a:t>
+              <a:t>Each employee becomes a 5-dimensional health vector</a:t>
             </a:r>
           </a:p>
         </p:txBody>
@@ -8495,9 +9615,6 @@
                 <a:latin typeface="Calibri"/>
               </a:defRPr>
             </a:pPr>
-            <a:r>
-              <a:t>  • b1..b25, k1..k15,</a:t>
-            </a:r>
           </a:p>
           <a:p>
             <a:pPr>
@@ -8512,7 +9629,23 @@
               </a:defRPr>
             </a:pPr>
             <a:r>
-              <a:t>    p1..p10, e1..e10</a:t>
+              <a:t>  (per-cell b/k/p/e</a:t>
+            </a:r>
+          </a:p>
+          <a:p>
+            <a:pPr>
+              <a:spcAft>
+                <a:spcPts val="400"/>
+              </a:spcAft>
+              <a:defRPr sz="1100">
+                <a:solidFill>
+                  <a:srgbClr val="1E293B"/>
+                </a:solidFill>
+                <a:latin typeface="Calibri"/>
+              </a:defRPr>
+            </a:pPr>
+            <a:r>
+              <a:t>   fields excluded)</a:t>
             </a:r>
           </a:p>
         </p:txBody>
@@ -8525,7 +9658,7 @@
         </p:nvSpPr>
         <p:spPr>
           <a:xfrm>
-            <a:off x="3566160" y="1554480"/>
+            <a:off x="3566160" y="1737360"/>
             <a:ext cx="2743200" cy="1463040"/>
           </a:xfrm>
           <a:prstGeom prst="roundRect">
@@ -8570,7 +9703,7 @@
         </p:nvSpPr>
         <p:spPr>
           <a:xfrm>
-            <a:off x="3703320" y="1645920"/>
+            <a:off x="3703320" y="1828800"/>
             <a:ext cx="2468880" cy="411480"/>
           </a:xfrm>
           <a:prstGeom prst="rect">
@@ -8606,7 +9739,7 @@
         </p:nvSpPr>
         <p:spPr>
           <a:xfrm>
-            <a:off x="3703320" y="2057400"/>
+            <a:off x="3703320" y="2240280"/>
             <a:ext cx="2468880" cy="868680"/>
           </a:xfrm>
           <a:prstGeom prst="rect">
@@ -8646,7 +9779,7 @@
         </p:nvSpPr>
         <p:spPr>
           <a:xfrm>
-            <a:off x="6492240" y="1554480"/>
+            <a:off x="6446520" y="1737360"/>
             <a:ext cx="2743200" cy="1463040"/>
           </a:xfrm>
           <a:prstGeom prst="roundRect">
@@ -8691,7 +9824,7 @@
         </p:nvSpPr>
         <p:spPr>
           <a:xfrm>
-            <a:off x="6629400" y="1645920"/>
+            <a:off x="6583680" y="1828800"/>
             <a:ext cx="2468880" cy="411480"/>
           </a:xfrm>
           <a:prstGeom prst="rect">
@@ -8727,7 +9860,7 @@
         </p:nvSpPr>
         <p:spPr>
           <a:xfrm>
-            <a:off x="6629400" y="2057400"/>
+            <a:off x="6583680" y="2240280"/>
             <a:ext cx="2468880" cy="868680"/>
           </a:xfrm>
           <a:prstGeom prst="rect">
@@ -8771,7 +9904,7 @@
         </p:nvSpPr>
         <p:spPr>
           <a:xfrm>
-            <a:off x="3566160" y="3154680"/>
+            <a:off x="9326880" y="1737360"/>
             <a:ext cx="2743200" cy="1463040"/>
           </a:xfrm>
           <a:prstGeom prst="roundRect">
@@ -8816,7 +9949,7 @@
         </p:nvSpPr>
         <p:spPr>
           <a:xfrm>
-            <a:off x="3703320" y="3246120"/>
+            <a:off x="9464040" y="1828800"/>
             <a:ext cx="2468880" cy="411480"/>
           </a:xfrm>
           <a:prstGeom prst="rect">
@@ -8852,7 +9985,7 @@
         </p:nvSpPr>
         <p:spPr>
           <a:xfrm>
-            <a:off x="3703320" y="3657600"/>
+            <a:off x="9464040" y="2240280"/>
             <a:ext cx="2468880" cy="868680"/>
           </a:xfrm>
           <a:prstGeom prst="rect">
@@ -8892,7 +10025,7 @@
         </p:nvSpPr>
         <p:spPr>
           <a:xfrm>
-            <a:off x="6492240" y="3154680"/>
+            <a:off x="5006340" y="3474720"/>
             <a:ext cx="2743200" cy="1463040"/>
           </a:xfrm>
           <a:prstGeom prst="roundRect">
@@ -8937,7 +10070,7 @@
         </p:nvSpPr>
         <p:spPr>
           <a:xfrm>
-            <a:off x="6629400" y="3246120"/>
+            <a:off x="5143500" y="3566160"/>
             <a:ext cx="2468880" cy="411480"/>
           </a:xfrm>
           <a:prstGeom prst="rect">
@@ -8973,7 +10106,7 @@
         </p:nvSpPr>
         <p:spPr>
           <a:xfrm>
-            <a:off x="6629400" y="3657600"/>
+            <a:off x="5143500" y="3977640"/>
             <a:ext cx="2468880" cy="868680"/>
           </a:xfrm>
           <a:prstGeom prst="rect">
@@ -9017,7 +10150,7 @@
         </p:nvSpPr>
         <p:spPr>
           <a:xfrm>
-            <a:off x="3566160" y="4754880"/>
+            <a:off x="7886700" y="3474720"/>
             <a:ext cx="2743200" cy="1463040"/>
           </a:xfrm>
           <a:prstGeom prst="roundRect">
@@ -9062,7 +10195,7 @@
         </p:nvSpPr>
         <p:spPr>
           <a:xfrm>
-            <a:off x="3703320" y="4846320"/>
+            <a:off x="8023860" y="3566160"/>
             <a:ext cx="2468880" cy="411480"/>
           </a:xfrm>
           <a:prstGeom prst="rect">
@@ -9098,7 +10231,7 @@
         </p:nvSpPr>
         <p:spPr>
           <a:xfrm>
-            <a:off x="3703320" y="5257800"/>
+            <a:off x="8023860" y="3977640"/>
             <a:ext cx="2468880" cy="868680"/>
           </a:xfrm>
           <a:prstGeom prst="rect">
@@ -9138,128 +10271,7 @@
         </p:nvSpPr>
         <p:spPr>
           <a:xfrm>
-            <a:off x="6492240" y="4754880"/>
-            <a:ext cx="2743200" cy="1463040"/>
-          </a:xfrm>
-          <a:prstGeom prst="roundRect">
-            <a:avLst/>
-          </a:prstGeom>
-          <a:solidFill>
-            <a:srgbClr val="FEE2E2"/>
-          </a:solidFill>
-          <a:ln w="15875">
-            <a:solidFill>
-              <a:srgbClr val="DC2626"/>
-            </a:solidFill>
-          </a:ln>
-        </p:spPr>
-        <p:style>
-          <a:lnRef idx="1">
-            <a:schemeClr val="accent1"/>
-          </a:lnRef>
-          <a:fillRef idx="3">
-            <a:schemeClr val="accent1"/>
-          </a:fillRef>
-          <a:effectRef idx="2">
-            <a:schemeClr val="accent1"/>
-          </a:effectRef>
-          <a:fontRef idx="minor">
-            <a:schemeClr val="lt1"/>
-          </a:fontRef>
-        </p:style>
-        <p:txBody>
-          <a:bodyPr rtlCol="0" anchor="ctr"/>
-          <a:lstStyle/>
-          <a:p>
-            <a:pPr algn="ctr"/>
-          </a:p>
-        </p:txBody>
-      </p:sp>
-      <p:sp>
-        <p:nvSpPr>
-          <p:cNvPr id="24" name="TextBox 23"/>
-          <p:cNvSpPr txBox="1"/>
-          <p:nvPr/>
-        </p:nvSpPr>
-        <p:spPr>
-          <a:xfrm>
-            <a:off x="6629400" y="4846320"/>
-            <a:ext cx="2468880" cy="411480"/>
-          </a:xfrm>
-          <a:prstGeom prst="rect">
-            <a:avLst/>
-          </a:prstGeom>
-          <a:noFill/>
-        </p:spPr>
-        <p:txBody>
-          <a:bodyPr wrap="square">
-            <a:spAutoFit/>
-          </a:bodyPr>
-          <a:lstStyle/>
-          <a:p>
-            <a:pPr algn="l">
-              <a:defRPr sz="1300" b="1">
-                <a:solidFill>
-                  <a:srgbClr val="1E293B"/>
-                </a:solidFill>
-                <a:latin typeface="Calibri"/>
-              </a:defRPr>
-            </a:pPr>
-            <a:r>
-              <a:t>6. Critical Gap Score</a:t>
-            </a:r>
-          </a:p>
-        </p:txBody>
-      </p:sp>
-      <p:sp>
-        <p:nvSpPr>
-          <p:cNvPr id="25" name="TextBox 24"/>
-          <p:cNvSpPr txBox="1"/>
-          <p:nvPr/>
-        </p:nvSpPr>
-        <p:spPr>
-          <a:xfrm>
-            <a:off x="6629400" y="5257800"/>
-            <a:ext cx="2468880" cy="868680"/>
-          </a:xfrm>
-          <a:prstGeom prst="rect">
-            <a:avLst/>
-          </a:prstGeom>
-          <a:noFill/>
-        </p:spPr>
-        <p:txBody>
-          <a:bodyPr wrap="square">
-            <a:spAutoFit/>
-          </a:bodyPr>
-          <a:lstStyle/>
-          <a:p>
-            <a:pPr algn="l">
-              <a:defRPr sz="1100" b="0">
-                <a:solidFill>
-                  <a:srgbClr val="1E293B"/>
-                </a:solidFill>
-                <a:latin typeface="Calibri"/>
-              </a:defRPr>
-            </a:pPr>
-            <a:r>
-              <a:t>1 - (cells ≤ 1 /</a:t>
-            </a:r>
-            <a:br/>
-            <a:r>
-              <a:t>total cells)</a:t>
-            </a:r>
-          </a:p>
-        </p:txBody>
-      </p:sp>
-      <p:sp>
-        <p:nvSpPr>
-          <p:cNvPr id="26" name="Rounded Rectangle 25"/>
-          <p:cNvSpPr/>
-          <p:nvPr/>
-        </p:nvSpPr>
-        <p:spPr>
-          <a:xfrm>
-            <a:off x="9418320" y="1554480"/>
+            <a:off x="12252960" y="1554480"/>
             <a:ext cx="2377440" cy="4846320"/>
           </a:xfrm>
           <a:prstGeom prst="roundRect">
@@ -9298,13 +10310,13 @@
       </p:sp>
       <p:sp>
         <p:nvSpPr>
-          <p:cNvPr id="27" name="TextBox 26"/>
+          <p:cNvPr id="24" name="TextBox 23"/>
           <p:cNvSpPr txBox="1"/>
           <p:nvPr/>
         </p:nvSpPr>
         <p:spPr>
           <a:xfrm>
-            <a:off x="9601200" y="1691640"/>
+            <a:off x="12435840" y="1691640"/>
             <a:ext cx="2011680" cy="365760"/>
           </a:xfrm>
           <a:prstGeom prst="rect">
@@ -9334,13 +10346,13 @@
       </p:sp>
       <p:sp>
         <p:nvSpPr>
-          <p:cNvPr id="28" name="TextBox 27"/>
+          <p:cNvPr id="25" name="TextBox 24"/>
           <p:cNvSpPr txBox="1"/>
           <p:nvPr/>
         </p:nvSpPr>
         <p:spPr>
           <a:xfrm>
-            <a:off x="9601200" y="2103120"/>
+            <a:off x="12435840" y="2103120"/>
             <a:ext cx="2103120" cy="4114800"/>
           </a:xfrm>
           <a:prstGeom prst="rect">
@@ -9367,7 +10379,7 @@
             </a:r>
             <a:br/>
             <a:r>
-              <a:t>  "employee_id": 23267,</a:t>
+              <a:t>  "dummy_id": 23267,</a:t>
             </a:r>
             <a:br/>
             <a:r>
@@ -9379,31 +10391,23 @@
             </a:r>
             <a:br/>
             <a:r>
-              <a:t>  "combined": 0.72,</a:t>
+              <a:t>  "combined_competency":</a:t>
             </a:r>
             <a:br/>
             <a:r>
+              <a:t>    0.72,</a:t>
+            </a:r>
+            <a:br/>
+            <a:r>
               <a:t>  "grade_fit": 1.0,</a:t>
             </a:r>
             <a:br/>
             <a:r>
-              <a:t>  "tenure_ready": 0.85,</a:t>
+              <a:t>  "tenure_readiness":</a:t>
             </a:r>
             <a:br/>
             <a:r>
-              <a:t>  "gap_score": 0.88,</a:t>
-            </a:r>
-            <a:br/>
-            <a:r>
-              <a:t>  "gap_cells": [</a:t>
-            </a:r>
-            <a:br/>
-            <a:r>
-              <a:t>    "k3","p2","e1"</a:t>
-            </a:r>
-            <a:br/>
-            <a:r>
-              <a:t>  ]</a:t>
+              <a:t>    0.85</a:t>
             </a:r>
             <a:br/>
             <a:r>
@@ -9505,7 +10509,7 @@
               </a:defRPr>
             </a:pPr>
             <a:r>
-              <a:t>Every formula is deterministic, traceable, and tunable</a:t>
+              <a:t>Every formula is deterministic, traceable, and tunable via config</a:t>
             </a:r>
           </a:p>
         </p:txBody>
@@ -10011,7 +11015,7 @@
               </a:defRPr>
             </a:pPr>
             <a:r>
-              <a:t>combined =</a:t>
+              <a:t>combined_competency =</a:t>
             </a:r>
             <a:br/>
             <a:r>
@@ -10024,11 +11028,11 @@
             <a:br/>
             <a:br/>
             <a:r>
-              <a:t> (if tpcp_health = 0 →</a:t>
+              <a:t> (if one input is 0 →</a:t>
             </a:r>
             <a:br/>
             <a:r>
-              <a:t>  combined = cbs_health)</a:t>
+              <a:t>  combined = the other)</a:t>
             </a:r>
           </a:p>
         </p:txBody>
@@ -10077,7 +11081,7 @@
         </p:nvSpPr>
         <p:spPr>
           <a:xfrm>
-            <a:off x="365760" y="3977640"/>
+            <a:off x="2285999" y="4023360"/>
             <a:ext cx="3749039" cy="2377440"/>
           </a:xfrm>
           <a:prstGeom prst="roundRect">
@@ -10122,7 +11126,7 @@
         </p:nvSpPr>
         <p:spPr>
           <a:xfrm>
-            <a:off x="502920" y="4069080"/>
+            <a:off x="2423159" y="4114800"/>
             <a:ext cx="3474719" cy="365760"/>
           </a:xfrm>
           <a:prstGeom prst="rect">
@@ -10158,7 +11162,7 @@
         </p:nvSpPr>
         <p:spPr>
           <a:xfrm>
-            <a:off x="502920" y="4480560"/>
+            <a:off x="2423159" y="4526280"/>
             <a:ext cx="3474719" cy="1463040"/>
           </a:xfrm>
           <a:prstGeom prst="rect">
@@ -10211,7 +11215,7 @@
         </p:nvSpPr>
         <p:spPr>
           <a:xfrm>
-            <a:off x="502920" y="5943600"/>
+            <a:off x="2423159" y="5989320"/>
             <a:ext cx="3474719" cy="320040"/>
           </a:xfrm>
           <a:prstGeom prst="rect">
@@ -10247,7 +11251,7 @@
         </p:nvSpPr>
         <p:spPr>
           <a:xfrm>
-            <a:off x="4206239" y="3977640"/>
+            <a:off x="6126478" y="4023360"/>
             <a:ext cx="3749039" cy="2377440"/>
           </a:xfrm>
           <a:prstGeom prst="roundRect">
@@ -10292,7 +11296,7 @@
         </p:nvSpPr>
         <p:spPr>
           <a:xfrm>
-            <a:off x="4343399" y="4069080"/>
+            <a:off x="6263638" y="4114800"/>
             <a:ext cx="3474719" cy="365760"/>
           </a:xfrm>
           <a:prstGeom prst="rect">
@@ -10328,7 +11332,7 @@
         </p:nvSpPr>
         <p:spPr>
           <a:xfrm>
-            <a:off x="4343399" y="4480560"/>
+            <a:off x="6263638" y="4526280"/>
             <a:ext cx="3474719" cy="1463040"/>
           </a:xfrm>
           <a:prstGeom prst="rect">
@@ -10385,7 +11389,7 @@
         </p:nvSpPr>
         <p:spPr>
           <a:xfrm>
-            <a:off x="4343399" y="5943600"/>
+            <a:off x="6263638" y="5989320"/>
             <a:ext cx="3474719" cy="320040"/>
           </a:xfrm>
           <a:prstGeom prst="rect">
@@ -10409,177 +11413,6 @@
             </a:pPr>
             <a:r>
               <a:t>→ gates promotability</a:t>
-            </a:r>
-          </a:p>
-        </p:txBody>
-      </p:sp>
-      <p:sp>
-        <p:nvSpPr>
-          <p:cNvPr id="25" name="Rounded Rectangle 24"/>
-          <p:cNvSpPr/>
-          <p:nvPr/>
-        </p:nvSpPr>
-        <p:spPr>
-          <a:xfrm>
-            <a:off x="8046718" y="3977640"/>
-            <a:ext cx="3749039" cy="2377440"/>
-          </a:xfrm>
-          <a:prstGeom prst="roundRect">
-            <a:avLst/>
-          </a:prstGeom>
-          <a:solidFill>
-            <a:srgbClr val="FEE2E2"/>
-          </a:solidFill>
-          <a:ln w="15875">
-            <a:solidFill>
-              <a:srgbClr val="DC2626"/>
-            </a:solidFill>
-          </a:ln>
-        </p:spPr>
-        <p:style>
-          <a:lnRef idx="1">
-            <a:schemeClr val="accent1"/>
-          </a:lnRef>
-          <a:fillRef idx="3">
-            <a:schemeClr val="accent1"/>
-          </a:fillRef>
-          <a:effectRef idx="2">
-            <a:schemeClr val="accent1"/>
-          </a:effectRef>
-          <a:fontRef idx="minor">
-            <a:schemeClr val="lt1"/>
-          </a:fontRef>
-        </p:style>
-        <p:txBody>
-          <a:bodyPr rtlCol="0" anchor="ctr"/>
-          <a:lstStyle/>
-          <a:p>
-            <a:pPr algn="ctr"/>
-          </a:p>
-        </p:txBody>
-      </p:sp>
-      <p:sp>
-        <p:nvSpPr>
-          <p:cNvPr id="26" name="TextBox 25"/>
-          <p:cNvSpPr txBox="1"/>
-          <p:nvPr/>
-        </p:nvSpPr>
-        <p:spPr>
-          <a:xfrm>
-            <a:off x="8183878" y="4069080"/>
-            <a:ext cx="3474719" cy="365760"/>
-          </a:xfrm>
-          <a:prstGeom prst="rect">
-            <a:avLst/>
-          </a:prstGeom>
-          <a:noFill/>
-        </p:spPr>
-        <p:txBody>
-          <a:bodyPr wrap="square">
-            <a:spAutoFit/>
-          </a:bodyPr>
-          <a:lstStyle/>
-          <a:p>
-            <a:pPr algn="l">
-              <a:defRPr sz="1400" b="1">
-                <a:solidFill>
-                  <a:srgbClr val="1E293B"/>
-                </a:solidFill>
-                <a:latin typeface="Calibri"/>
-              </a:defRPr>
-            </a:pPr>
-            <a:r>
-              <a:t>6. Critical Gap Score</a:t>
-            </a:r>
-          </a:p>
-        </p:txBody>
-      </p:sp>
-      <p:sp>
-        <p:nvSpPr>
-          <p:cNvPr id="27" name="TextBox 26"/>
-          <p:cNvSpPr txBox="1"/>
-          <p:nvPr/>
-        </p:nvSpPr>
-        <p:spPr>
-          <a:xfrm>
-            <a:off x="8183878" y="4480560"/>
-            <a:ext cx="3474719" cy="1463040"/>
-          </a:xfrm>
-          <a:prstGeom prst="rect">
-            <a:avLst/>
-          </a:prstGeom>
-          <a:noFill/>
-        </p:spPr>
-        <p:txBody>
-          <a:bodyPr wrap="square">
-            <a:spAutoFit/>
-          </a:bodyPr>
-          <a:lstStyle/>
-          <a:p>
-            <a:pPr>
-              <a:defRPr sz="1000">
-                <a:solidFill>
-                  <a:srgbClr val="1E293B"/>
-                </a:solidFill>
-                <a:latin typeface="Consolas"/>
-              </a:defRPr>
-            </a:pPr>
-            <a:r>
-              <a:t>cells = b1..b25, k1..k15,</a:t>
-            </a:r>
-            <a:br/>
-            <a:r>
-              <a:t>        p1..p10, e1..e10</a:t>
-            </a:r>
-            <a:br/>
-            <a:br/>
-            <a:r>
-              <a:t>gap_count = |cells ≤ 1|</a:t>
-            </a:r>
-            <a:br/>
-            <a:br/>
-            <a:r>
-              <a:t>score = 1 − (gap_count /</a:t>
-            </a:r>
-            <a:br/>
-            <a:r>
-              <a:t>             total_cells)</a:t>
-            </a:r>
-          </a:p>
-        </p:txBody>
-      </p:sp>
-      <p:sp>
-        <p:nvSpPr>
-          <p:cNvPr id="28" name="TextBox 27"/>
-          <p:cNvSpPr txBox="1"/>
-          <p:nvPr/>
-        </p:nvSpPr>
-        <p:spPr>
-          <a:xfrm>
-            <a:off x="8183878" y="5943600"/>
-            <a:ext cx="3474719" cy="320040"/>
-          </a:xfrm>
-          <a:prstGeom prst="rect">
-            <a:avLst/>
-          </a:prstGeom>
-          <a:noFill/>
-        </p:spPr>
-        <p:txBody>
-          <a:bodyPr wrap="square">
-            <a:spAutoFit/>
-          </a:bodyPr>
-          <a:lstStyle/>
-          <a:p>
-            <a:pPr algn="l">
-              <a:defRPr sz="1000" b="1">
-                <a:solidFill>
-                  <a:srgbClr val="DC2626"/>
-                </a:solidFill>
-                <a:latin typeface="Calibri"/>
-              </a:defRPr>
-            </a:pPr>
-            <a:r>
-              <a:t>→ also feeds gap matrix</a:t>
             </a:r>
           </a:p>
         </p:txBody>
@@ -10898,8 +11731,9 @@
               <a:t>  emerging_pct      : 0.80</a:t>
             </a:r>
             <a:br/>
-            <a:r>
-              <a:t>  b,k,p,e cells ≤ 1 : 3 of 60</a:t>
+            <a:br/>
+            <a:r>
+              <a:t>(per-cell fields ignored)</a:t>
             </a:r>
           </a:p>
         </p:txBody>
@@ -11098,7 +11932,11 @@
             <a:br/>
             <a:br/>
             <a:r>
-              <a:t>combined = 0.55 × 0.87</a:t>
+              <a:t>combined_competency</a:t>
+            </a:r>
+            <a:br/>
+            <a:r>
+              <a:t>         = 0.55 × 0.87</a:t>
             </a:r>
             <a:br/>
             <a:r>
@@ -11115,11 +11953,7 @@
             </a:r>
             <a:br/>
             <a:r>
-              <a:t>tenure     : 4.2/4.0 capped   = 1.0</a:t>
-            </a:r>
-            <a:br/>
-            <a:r>
-              <a:t>gap_score  : 1 − 3/60         = 0.95</a:t>
+              <a:t>tenure     : 4.2/4.0 capped    = 1.0</a:t>
             </a:r>
           </a:p>
         </p:txBody>
@@ -11284,27 +12118,27 @@
             </a:r>
             <a:br/>
             <a:r>
-              <a:t>  "combined": 0.77,</a:t>
+              <a:t>  "combined_competency":</a:t>
             </a:r>
             <a:br/>
             <a:r>
+              <a:t>    0.77,</a:t>
+            </a:r>
+            <a:br/>
+            <a:r>
               <a:t>  "grade_fit": 1.0,</a:t>
             </a:r>
             <a:br/>
             <a:r>
-              <a:t>  "tenure_ready": 1.0,</a:t>
+              <a:t>  "tenure_readiness":</a:t>
             </a:r>
             <a:br/>
             <a:r>
-              <a:t>  "gap_score": 0.95,</a:t>
+              <a:t>    1.0,</a:t>
             </a:r>
             <a:br/>
             <a:r>
-              <a:t>  "promotable": true,</a:t>
-            </a:r>
-            <a:br/>
-            <a:r>
-              <a:t>  "gap_count": 3</a:t>
+              <a:t>  "promotable": true</a:t>
             </a:r>
             <a:br/>
             <a:r>
@@ -11406,7 +12240,7 @@
               </a:defRPr>
             </a:pPr>
             <a:r>
-              <a:t>Stage 3 runs 3 analyses in parallel over the scored population</a:t>
+              <a:t>Stage 4 runs 2 analyses in parallel over the scored population — engine stops here</a:t>
             </a:r>
           </a:p>
         </p:txBody>
@@ -11566,7 +12400,7 @@
               </a:defRPr>
             </a:pPr>
             <a:r>
-              <a:t>N employees × 6 scores each</a:t>
+              <a:t>N employees × 5 scores each</a:t>
             </a:r>
           </a:p>
         </p:txBody>
@@ -11579,8 +12413,8 @@
         </p:nvCxnSpPr>
         <p:spPr>
           <a:xfrm flipH="1">
-            <a:off x="2103120" y="2560320"/>
-            <a:ext cx="4023360" cy="640080"/>
+            <a:off x="2743200" y="2560320"/>
+            <a:ext cx="3383280" cy="640080"/>
           </a:xfrm>
           <a:prstGeom prst="line">
             <a:avLst/>
@@ -11616,7 +12450,7 @@
         <p:spPr>
           <a:xfrm>
             <a:off x="6126480" y="2560320"/>
-            <a:ext cx="0" cy="640080"/>
+            <a:ext cx="3383280" cy="640080"/>
           </a:xfrm>
           <a:prstGeom prst="line">
             <a:avLst/>
@@ -11643,52 +12477,16 @@
           </a:fontRef>
         </p:style>
       </p:cxnSp>
-      <p:cxnSp>
-        <p:nvCxnSpPr>
-          <p:cNvPr id="10" name="Connector 9"/>
-          <p:cNvCxnSpPr/>
-          <p:nvPr/>
-        </p:nvCxnSpPr>
-        <p:spPr>
-          <a:xfrm>
-            <a:off x="6126480" y="2560320"/>
-            <a:ext cx="4023360" cy="640080"/>
-          </a:xfrm>
-          <a:prstGeom prst="line">
-            <a:avLst/>
-          </a:prstGeom>
-          <a:ln w="25400">
-            <a:solidFill>
-              <a:srgbClr val="64748B"/>
-            </a:solidFill>
-            <a:tailEnd type="triangle" w="med" h="med"/>
-          </a:ln>
-        </p:spPr>
-        <p:style>
-          <a:lnRef idx="2">
-            <a:schemeClr val="accent1"/>
-          </a:lnRef>
-          <a:fillRef idx="0">
-            <a:schemeClr val="accent1"/>
-          </a:fillRef>
-          <a:effectRef idx="1">
-            <a:schemeClr val="accent1"/>
-          </a:effectRef>
-          <a:fontRef idx="minor">
-            <a:schemeClr val="tx1"/>
-          </a:fontRef>
-        </p:style>
-      </p:cxnSp>
-      <p:sp>
-        <p:nvSpPr>
-          <p:cNvPr id="11" name="Rounded Rectangle 10"/>
+      <p:sp>
+        <p:nvSpPr>
+          <p:cNvPr id="10" name="Rounded Rectangle 9"/>
           <p:cNvSpPr/>
           <p:nvPr/>
         </p:nvSpPr>
         <p:spPr>
           <a:xfrm>
-            <a:off x="548640" y="3108960"/>
-            <a:ext cx="3520440" cy="3383280"/>
+            <a:off x="1005840" y="3108960"/>
+            <a:ext cx="4389120" cy="3520440"/>
           </a:xfrm>
           <a:prstGeom prst="roundRect">
             <a:avLst/>
@@ -11726,14 +12524,14 @@
       </p:sp>
       <p:sp>
         <p:nvSpPr>
-          <p:cNvPr id="12" name="TextBox 11"/>
+          <p:cNvPr id="11" name="TextBox 10"/>
           <p:cNvSpPr txBox="1"/>
           <p:nvPr/>
         </p:nvSpPr>
         <p:spPr>
           <a:xfrm>
-            <a:off x="685800" y="3246120"/>
-            <a:ext cx="3246120" cy="411480"/>
+            <a:off x="1143000" y="3246120"/>
+            <a:ext cx="4114800" cy="411480"/>
           </a:xfrm>
           <a:prstGeom prst="rect">
             <a:avLst/>
@@ -11755,21 +12553,21 @@
               </a:defRPr>
             </a:pPr>
             <a:r>
-              <a:t>A. Team Rollup</a:t>
-            </a:r>
-          </a:p>
-        </p:txBody>
-      </p:sp>
-      <p:sp>
-        <p:nvSpPr>
-          <p:cNvPr id="13" name="TextBox 12"/>
+              <a:t>A. Team Aggregate</a:t>
+            </a:r>
+          </a:p>
+        </p:txBody>
+      </p:sp>
+      <p:sp>
+        <p:nvSpPr>
+          <p:cNvPr id="12" name="TextBox 11"/>
           <p:cNvSpPr txBox="1"/>
           <p:nvPr/>
         </p:nvSpPr>
         <p:spPr>
           <a:xfrm>
-            <a:off x="731520" y="3749040"/>
-            <a:ext cx="3154680" cy="2651760"/>
+            <a:off x="1188720" y="3703320"/>
+            <a:ext cx="4023360" cy="2834640"/>
           </a:xfrm>
           <a:prstGeom prst="rect">
             <a:avLst/>
@@ -11786,15 +12584,15 @@
               <a:spcAft>
                 <a:spcPts val="400"/>
               </a:spcAft>
-              <a:defRPr sz="1100">
-                <a:solidFill>
-                  <a:srgbClr val="1E293B"/>
-                </a:solidFill>
-                <a:latin typeface="Calibri"/>
-              </a:defRPr>
-            </a:pPr>
-            <a:r>
-              <a:t>• pass rate, level distribution</a:t>
+              <a:defRPr sz="1050">
+                <a:solidFill>
+                  <a:srgbClr val="1E293B"/>
+                </a:solidFill>
+                <a:latin typeface="Calibri"/>
+              </a:defRPr>
+            </a:pPr>
+            <a:r>
+              <a:t>Headline team statistics:</a:t>
             </a:r>
           </a:p>
           <a:p>
@@ -11802,31 +12600,28 @@
               <a:spcAft>
                 <a:spcPts val="400"/>
               </a:spcAft>
-              <a:defRPr sz="1100">
-                <a:solidFill>
-                  <a:srgbClr val="1E293B"/>
-                </a:solidFill>
-                <a:latin typeface="Calibri"/>
-              </a:defRPr>
-            </a:pPr>
-            <a:r>
-              <a:t>• avg combined / TPCP / CBS</a:t>
-            </a:r>
+              <a:defRPr sz="1050">
+                <a:solidFill>
+                  <a:srgbClr val="1E293B"/>
+                </a:solidFill>
+                <a:latin typeface="Calibri"/>
+              </a:defRPr>
+            </a:pPr>
           </a:p>
           <a:p>
             <a:pPr>
               <a:spcAft>
                 <a:spcPts val="400"/>
               </a:spcAft>
-              <a:defRPr sz="1100">
-                <a:solidFill>
-                  <a:srgbClr val="1E293B"/>
-                </a:solidFill>
-                <a:latin typeface="Calibri"/>
-              </a:defRPr>
-            </a:pPr>
-            <a:r>
-              <a:t>• not_assessed count</a:t>
+              <a:defRPr sz="1050">
+                <a:solidFill>
+                  <a:srgbClr val="1E293B"/>
+                </a:solidFill>
+                <a:latin typeface="Calibri"/>
+              </a:defRPr>
+            </a:pPr>
+            <a:r>
+              <a:t>• team_size, assessed_count,</a:t>
             </a:r>
           </a:p>
           <a:p>
@@ -11834,15 +12629,15 @@
               <a:spcAft>
                 <a:spcPts val="400"/>
               </a:spcAft>
-              <a:defRPr sz="1100">
-                <a:solidFill>
-                  <a:srgbClr val="1E293B"/>
-                </a:solidFill>
-                <a:latin typeface="Calibri"/>
-              </a:defRPr>
-            </a:pPr>
-            <a:r>
-              <a:t>• grade-level headcounts</a:t>
+              <a:defRPr sz="1050">
+                <a:solidFill>
+                  <a:srgbClr val="1E293B"/>
+                </a:solidFill>
+                <a:latin typeface="Calibri"/>
+              </a:defRPr>
+            </a:pPr>
+            <a:r>
+              <a:t>   not_assessed_count</a:t>
             </a:r>
           </a:p>
           <a:p>
@@ -11850,28 +12645,31 @@
               <a:spcAft>
                 <a:spcPts val="400"/>
               </a:spcAft>
-              <a:defRPr sz="1100">
-                <a:solidFill>
-                  <a:srgbClr val="1E293B"/>
-                </a:solidFill>
-                <a:latin typeface="Calibri"/>
-              </a:defRPr>
-            </a:pPr>
+              <a:defRPr sz="1050">
+                <a:solidFill>
+                  <a:srgbClr val="1E293B"/>
+                </a:solidFill>
+                <a:latin typeface="Calibri"/>
+              </a:defRPr>
+            </a:pPr>
+            <a:r>
+              <a:t>• pass_rate</a:t>
+            </a:r>
           </a:p>
           <a:p>
             <a:pPr>
               <a:spcAft>
                 <a:spcPts val="400"/>
               </a:spcAft>
-              <a:defRPr sz="1100">
-                <a:solidFill>
-                  <a:srgbClr val="1E293B"/>
-                </a:solidFill>
-                <a:latin typeface="Calibri"/>
-              </a:defRPr>
-            </a:pPr>
-            <a:r>
-              <a:t>ANSWERS:</a:t>
+              <a:defRPr sz="1050">
+                <a:solidFill>
+                  <a:srgbClr val="1E293B"/>
+                </a:solidFill>
+                <a:latin typeface="Calibri"/>
+              </a:defRPr>
+            </a:pPr>
+            <a:r>
+              <a:t>• level_distribution</a:t>
             </a:r>
           </a:p>
           <a:p>
@@ -11879,15 +12677,15 @@
               <a:spcAft>
                 <a:spcPts val="400"/>
               </a:spcAft>
-              <a:defRPr sz="1100">
-                <a:solidFill>
-                  <a:srgbClr val="1E293B"/>
-                </a:solidFill>
-                <a:latin typeface="Calibri"/>
-              </a:defRPr>
-            </a:pPr>
-            <a:r>
-              <a:t>• How did my team perform?</a:t>
+              <a:defRPr sz="1050">
+                <a:solidFill>
+                  <a:srgbClr val="1E293B"/>
+                </a:solidFill>
+                <a:latin typeface="Calibri"/>
+              </a:defRPr>
+            </a:pPr>
+            <a:r>
+              <a:t>   (Staff, Principal, Custodian,</a:t>
             </a:r>
           </a:p>
           <a:p>
@@ -11895,15 +12693,15 @@
               <a:spcAft>
                 <a:spcPts val="400"/>
               </a:spcAft>
-              <a:defRPr sz="1100">
-                <a:solidFill>
-                  <a:srgbClr val="1E293B"/>
-                </a:solidFill>
-                <a:latin typeface="Calibri"/>
-              </a:defRPr>
-            </a:pPr>
-            <a:r>
-              <a:t>• Who has not completed TPCP?</a:t>
+              <a:defRPr sz="1050">
+                <a:solidFill>
+                  <a:srgbClr val="1E293B"/>
+                </a:solidFill>
+                <a:latin typeface="Calibri"/>
+              </a:defRPr>
+            </a:pPr>
+            <a:r>
+              <a:t>   Not TP)</a:t>
             </a:r>
           </a:p>
           <a:p>
@@ -11911,15 +12709,15 @@
               <a:spcAft>
                 <a:spcPts val="400"/>
               </a:spcAft>
-              <a:defRPr sz="1100">
-                <a:solidFill>
-                  <a:srgbClr val="1E293B"/>
-                </a:solidFill>
-                <a:latin typeface="Calibri"/>
-              </a:defRPr>
-            </a:pPr>
-            <a:r>
-              <a:t>• Enough Staff/Principal?</a:t>
+              <a:defRPr sz="1050">
+                <a:solidFill>
+                  <a:srgbClr val="1E293B"/>
+                </a:solidFill>
+                <a:latin typeface="Calibri"/>
+              </a:defRPr>
+            </a:pPr>
+            <a:r>
+              <a:t>• avg_combined_competency</a:t>
             </a:r>
           </a:p>
           <a:p>
@@ -11927,135 +12725,31 @@
               <a:spcAft>
                 <a:spcPts val="400"/>
               </a:spcAft>
-              <a:defRPr sz="1100">
-                <a:solidFill>
-                  <a:srgbClr val="1E293B"/>
-                </a:solidFill>
-                <a:latin typeface="Calibri"/>
-              </a:defRPr>
-            </a:pPr>
-            <a:r>
-              <a:t>• Overall SMA strength?</a:t>
-            </a:r>
-          </a:p>
-        </p:txBody>
-      </p:sp>
-      <p:sp>
-        <p:nvSpPr>
-          <p:cNvPr id="14" name="Rounded Rectangle 13"/>
-          <p:cNvSpPr/>
-          <p:nvPr/>
-        </p:nvSpPr>
-        <p:spPr>
-          <a:xfrm>
-            <a:off x="4617720" y="3108960"/>
-            <a:ext cx="3520440" cy="3383280"/>
-          </a:xfrm>
-          <a:prstGeom prst="roundRect">
-            <a:avLst/>
-          </a:prstGeom>
-          <a:solidFill>
-            <a:srgbClr val="FEF9C3"/>
-          </a:solidFill>
-          <a:ln w="15875">
-            <a:solidFill>
-              <a:srgbClr val="CA8A04"/>
-            </a:solidFill>
-          </a:ln>
-        </p:spPr>
-        <p:style>
-          <a:lnRef idx="1">
-            <a:schemeClr val="accent1"/>
-          </a:lnRef>
-          <a:fillRef idx="3">
-            <a:schemeClr val="accent1"/>
-          </a:fillRef>
-          <a:effectRef idx="2">
-            <a:schemeClr val="accent1"/>
-          </a:effectRef>
-          <a:fontRef idx="minor">
-            <a:schemeClr val="lt1"/>
-          </a:fontRef>
-        </p:style>
-        <p:txBody>
-          <a:bodyPr rtlCol="0" anchor="ctr"/>
-          <a:lstStyle/>
-          <a:p>
-            <a:pPr algn="ctr"/>
-          </a:p>
-        </p:txBody>
-      </p:sp>
-      <p:sp>
-        <p:nvSpPr>
-          <p:cNvPr id="15" name="TextBox 14"/>
-          <p:cNvSpPr txBox="1"/>
-          <p:nvPr/>
-        </p:nvSpPr>
-        <p:spPr>
-          <a:xfrm>
-            <a:off x="4754880" y="3246120"/>
-            <a:ext cx="3246120" cy="411480"/>
-          </a:xfrm>
-          <a:prstGeom prst="rect">
-            <a:avLst/>
-          </a:prstGeom>
-          <a:noFill/>
-        </p:spPr>
-        <p:txBody>
-          <a:bodyPr wrap="square">
-            <a:spAutoFit/>
-          </a:bodyPr>
-          <a:lstStyle/>
-          <a:p>
-            <a:pPr algn="ctr">
-              <a:defRPr sz="1500" b="1">
-                <a:solidFill>
-                  <a:srgbClr val="1E293B"/>
-                </a:solidFill>
-                <a:latin typeface="Calibri"/>
-              </a:defRPr>
-            </a:pPr>
-            <a:r>
-              <a:t>B. Gap Matrix</a:t>
-            </a:r>
-          </a:p>
-        </p:txBody>
-      </p:sp>
-      <p:sp>
-        <p:nvSpPr>
-          <p:cNvPr id="16" name="TextBox 15"/>
-          <p:cNvSpPr txBox="1"/>
-          <p:nvPr/>
-        </p:nvSpPr>
-        <p:spPr>
-          <a:xfrm>
-            <a:off x="4800600" y="3749040"/>
-            <a:ext cx="3154680" cy="2651760"/>
-          </a:xfrm>
-          <a:prstGeom prst="rect">
-            <a:avLst/>
-          </a:prstGeom>
-          <a:noFill/>
-        </p:spPr>
-        <p:txBody>
-          <a:bodyPr wrap="square">
-            <a:spAutoFit/>
-          </a:bodyPr>
-          <a:lstStyle/>
+              <a:defRPr sz="1050">
+                <a:solidFill>
+                  <a:srgbClr val="1E293B"/>
+                </a:solidFill>
+                <a:latin typeface="Calibri"/>
+              </a:defRPr>
+            </a:pPr>
+            <a:r>
+              <a:t>• avg_tpcp_health, avg_cbs_health</a:t>
+            </a:r>
+          </a:p>
           <a:p>
             <a:pPr>
               <a:spcAft>
                 <a:spcPts val="400"/>
               </a:spcAft>
-              <a:defRPr sz="1100">
-                <a:solidFill>
-                  <a:srgbClr val="1E293B"/>
-                </a:solidFill>
-                <a:latin typeface="Calibri"/>
-              </a:defRPr>
-            </a:pPr>
-            <a:r>
-              <a:t>For each cell (b1..e10):</a:t>
+              <a:defRPr sz="1050">
+                <a:solidFill>
+                  <a:srgbClr val="1E293B"/>
+                </a:solidFill>
+                <a:latin typeface="Calibri"/>
+              </a:defRPr>
+            </a:pPr>
+            <a:r>
+              <a:t>• weakest_dimension</a:t>
             </a:r>
           </a:p>
           <a:p>
@@ -12063,15 +12757,15 @@
               <a:spcAft>
                 <a:spcPts val="400"/>
               </a:spcAft>
-              <a:defRPr sz="1100">
-                <a:solidFill>
-                  <a:srgbClr val="1E293B"/>
-                </a:solidFill>
-                <a:latin typeface="Calibri"/>
-              </a:defRPr>
-            </a:pPr>
-            <a:r>
-              <a:t>  fail_rate = |score ≤ 1| / N</a:t>
+              <a:defRPr sz="1050">
+                <a:solidFill>
+                  <a:srgbClr val="1E293B"/>
+                </a:solidFill>
+                <a:latin typeface="Calibri"/>
+              </a:defRPr>
+            </a:pPr>
+            <a:r>
+              <a:t>   (base / key / pacing / emerging —</a:t>
             </a:r>
           </a:p>
           <a:p>
@@ -12079,28 +12773,31 @@
               <a:spcAft>
                 <a:spcPts val="400"/>
               </a:spcAft>
-              <a:defRPr sz="1100">
-                <a:solidFill>
-                  <a:srgbClr val="1E293B"/>
-                </a:solidFill>
-                <a:latin typeface="Calibri"/>
-              </a:defRPr>
-            </a:pPr>
+              <a:defRPr sz="1050">
+                <a:solidFill>
+                  <a:srgbClr val="1E293B"/>
+                </a:solidFill>
+                <a:latin typeface="Calibri"/>
+              </a:defRPr>
+            </a:pPr>
+            <a:r>
+              <a:t>    the block-level rollup with</a:t>
+            </a:r>
           </a:p>
           <a:p>
             <a:pPr>
               <a:spcAft>
                 <a:spcPts val="400"/>
               </a:spcAft>
-              <a:defRPr sz="1100">
-                <a:solidFill>
-                  <a:srgbClr val="1E293B"/>
-                </a:solidFill>
-                <a:latin typeface="Calibri"/>
-              </a:defRPr>
-            </a:pPr>
-            <a:r>
-              <a:t>Classify each cell:</a:t>
+              <a:defRPr sz="1050">
+                <a:solidFill>
+                  <a:srgbClr val="1E293B"/>
+                </a:solidFill>
+                <a:latin typeface="Calibri"/>
+              </a:defRPr>
+            </a:pPr>
+            <a:r>
+              <a:t>    the lowest team mean)</a:t>
             </a:r>
           </a:p>
           <a:p>
@@ -12108,31 +12805,28 @@
               <a:spcAft>
                 <a:spcPts val="400"/>
               </a:spcAft>
-              <a:defRPr sz="1100">
-                <a:solidFill>
-                  <a:srgbClr val="1E293B"/>
-                </a:solidFill>
-                <a:latin typeface="Calibri"/>
-              </a:defRPr>
-            </a:pPr>
-            <a:r>
-              <a:t>  ≥ 60%  → STRUCTURAL</a:t>
-            </a:r>
+              <a:defRPr sz="1050">
+                <a:solidFill>
+                  <a:srgbClr val="1E293B"/>
+                </a:solidFill>
+                <a:latin typeface="Calibri"/>
+              </a:defRPr>
+            </a:pPr>
           </a:p>
           <a:p>
             <a:pPr>
               <a:spcAft>
                 <a:spcPts val="400"/>
               </a:spcAft>
-              <a:defRPr sz="1100">
-                <a:solidFill>
-                  <a:srgbClr val="1E293B"/>
-                </a:solidFill>
-                <a:latin typeface="Calibri"/>
-              </a:defRPr>
-            </a:pPr>
-            <a:r>
-              <a:t>  20–60% → MIXED</a:t>
+              <a:defRPr sz="1050">
+                <a:solidFill>
+                  <a:srgbClr val="1E293B"/>
+                </a:solidFill>
+                <a:latin typeface="Calibri"/>
+              </a:defRPr>
+            </a:pPr>
+            <a:r>
+              <a:t>ANSWERS:</a:t>
             </a:r>
           </a:p>
           <a:p>
@@ -12140,15 +12834,15 @@
               <a:spcAft>
                 <a:spcPts val="400"/>
               </a:spcAft>
-              <a:defRPr sz="1100">
-                <a:solidFill>
-                  <a:srgbClr val="1E293B"/>
-                </a:solidFill>
-                <a:latin typeface="Calibri"/>
-              </a:defRPr>
-            </a:pPr>
-            <a:r>
-              <a:t>  &lt; 20%  → PEOPLE</a:t>
+              <a:defRPr sz="1050">
+                <a:solidFill>
+                  <a:srgbClr val="1E293B"/>
+                </a:solidFill>
+                <a:latin typeface="Calibri"/>
+              </a:defRPr>
+            </a:pPr>
+            <a:r>
+              <a:t>• How did my team perform?</a:t>
             </a:r>
           </a:p>
           <a:p>
@@ -12156,28 +12850,31 @@
               <a:spcAft>
                 <a:spcPts val="400"/>
               </a:spcAft>
-              <a:defRPr sz="1100">
-                <a:solidFill>
-                  <a:srgbClr val="1E293B"/>
-                </a:solidFill>
-                <a:latin typeface="Calibri"/>
-              </a:defRPr>
-            </a:pPr>
+              <a:defRPr sz="1050">
+                <a:solidFill>
+                  <a:srgbClr val="1E293B"/>
+                </a:solidFill>
+                <a:latin typeface="Calibri"/>
+              </a:defRPr>
+            </a:pPr>
+            <a:r>
+              <a:t>• Enough Staff/Principal?</a:t>
+            </a:r>
           </a:p>
           <a:p>
             <a:pPr>
               <a:spcAft>
                 <a:spcPts val="400"/>
               </a:spcAft>
-              <a:defRPr sz="1100">
-                <a:solidFill>
-                  <a:srgbClr val="1E293B"/>
-                </a:solidFill>
-                <a:latin typeface="Calibri"/>
-              </a:defRPr>
-            </a:pPr>
-            <a:r>
-              <a:t>ANSWERS:</a:t>
+              <a:defRPr sz="1050">
+                <a:solidFill>
+                  <a:srgbClr val="1E293B"/>
+                </a:solidFill>
+                <a:latin typeface="Calibri"/>
+              </a:defRPr>
+            </a:pPr>
+            <a:r>
+              <a:t>• Who hasn't completed TPCP?</a:t>
             </a:r>
           </a:p>
           <a:p>
@@ -12185,61 +12882,29 @@
               <a:spcAft>
                 <a:spcPts val="400"/>
               </a:spcAft>
-              <a:defRPr sz="1100">
-                <a:solidFill>
-                  <a:srgbClr val="1E293B"/>
-                </a:solidFill>
-                <a:latin typeface="Calibri"/>
-              </a:defRPr>
-            </a:pPr>
-            <a:r>
-              <a:t>• Which cells are weak?</a:t>
-            </a:r>
-          </a:p>
-          <a:p>
-            <a:pPr>
-              <a:spcAft>
-                <a:spcPts val="400"/>
-              </a:spcAft>
-              <a:defRPr sz="1100">
-                <a:solidFill>
-                  <a:srgbClr val="1E293B"/>
-                </a:solidFill>
-                <a:latin typeface="Calibri"/>
-              </a:defRPr>
-            </a:pPr>
-            <a:r>
-              <a:t>• Repeat gaps across people?</a:t>
-            </a:r>
-          </a:p>
-          <a:p>
-            <a:pPr>
-              <a:spcAft>
-                <a:spcPts val="400"/>
-              </a:spcAft>
-              <a:defRPr sz="1100">
-                <a:solidFill>
-                  <a:srgbClr val="1E293B"/>
-                </a:solidFill>
-                <a:latin typeface="Calibri"/>
-              </a:defRPr>
-            </a:pPr>
-            <a:r>
-              <a:t>• People vs structural?</a:t>
-            </a:r>
-          </a:p>
-        </p:txBody>
-      </p:sp>
-      <p:sp>
-        <p:nvSpPr>
-          <p:cNvPr id="17" name="Rounded Rectangle 16"/>
+              <a:defRPr sz="1050">
+                <a:solidFill>
+                  <a:srgbClr val="1E293B"/>
+                </a:solidFill>
+                <a:latin typeface="Calibri"/>
+              </a:defRPr>
+            </a:pPr>
+            <a:r>
+              <a:t>• Which block is weakest?</a:t>
+            </a:r>
+          </a:p>
+        </p:txBody>
+      </p:sp>
+      <p:sp>
+        <p:nvSpPr>
+          <p:cNvPr id="13" name="Rounded Rectangle 12"/>
           <p:cNvSpPr/>
           <p:nvPr/>
         </p:nvSpPr>
         <p:spPr>
           <a:xfrm>
-            <a:off x="8641080" y="3108960"/>
-            <a:ext cx="3520440" cy="3383280"/>
+            <a:off x="6903720" y="3108960"/>
+            <a:ext cx="4389120" cy="3520440"/>
           </a:xfrm>
           <a:prstGeom prst="roundRect">
             <a:avLst/>
@@ -12277,14 +12942,14 @@
       </p:sp>
       <p:sp>
         <p:nvSpPr>
-          <p:cNvPr id="18" name="TextBox 17"/>
+          <p:cNvPr id="14" name="TextBox 13"/>
           <p:cNvSpPr txBox="1"/>
           <p:nvPr/>
         </p:nvSpPr>
         <p:spPr>
           <a:xfrm>
-            <a:off x="8778240" y="3246120"/>
-            <a:ext cx="3246120" cy="411480"/>
+            <a:off x="7040880" y="3246120"/>
+            <a:ext cx="4114800" cy="411480"/>
           </a:xfrm>
           <a:prstGeom prst="rect">
             <a:avLst/>
@@ -12306,21 +12971,21 @@
               </a:defRPr>
             </a:pPr>
             <a:r>
-              <a:t>C. Individual Drill-Down</a:t>
-            </a:r>
-          </a:p>
-        </p:txBody>
-      </p:sp>
-      <p:sp>
-        <p:nvSpPr>
-          <p:cNvPr id="19" name="TextBox 18"/>
+              <a:t>B. Individual Drill-Down</a:t>
+            </a:r>
+          </a:p>
+        </p:txBody>
+      </p:sp>
+      <p:sp>
+        <p:nvSpPr>
+          <p:cNvPr id="15" name="TextBox 14"/>
           <p:cNvSpPr txBox="1"/>
           <p:nvPr/>
         </p:nvSpPr>
         <p:spPr>
           <a:xfrm>
-            <a:off x="8823960" y="3749040"/>
-            <a:ext cx="3154680" cy="2651760"/>
+            <a:off x="7086600" y="3703320"/>
+            <a:ext cx="4023360" cy="2834640"/>
           </a:xfrm>
           <a:prstGeom prst="rect">
             <a:avLst/>
@@ -12337,15 +13002,15 @@
               <a:spcAft>
                 <a:spcPts val="400"/>
               </a:spcAft>
-              <a:defRPr sz="1100">
-                <a:solidFill>
-                  <a:srgbClr val="1E293B"/>
-                </a:solidFill>
-                <a:latin typeface="Calibri"/>
-              </a:defRPr>
-            </a:pPr>
-            <a:r>
-              <a:t>• flag low combined (&lt; 0.5)</a:t>
+              <a:defRPr sz="1050">
+                <a:solidFill>
+                  <a:srgbClr val="1E293B"/>
+                </a:solidFill>
+                <a:latin typeface="Calibri"/>
+              </a:defRPr>
+            </a:pPr>
+            <a:r>
+              <a:t>Per-employee flags and lists:</a:t>
             </a:r>
           </a:p>
           <a:p>
@@ -12353,31 +13018,28 @@
               <a:spcAft>
                 <a:spcPts val="400"/>
               </a:spcAft>
-              <a:defRPr sz="1100">
-                <a:solidFill>
-                  <a:srgbClr val="1E293B"/>
-                </a:solidFill>
-                <a:latin typeface="Calibri"/>
-              </a:defRPr>
-            </a:pPr>
-            <a:r>
-              <a:t>• flag promotable (≥ 0.75 +</a:t>
-            </a:r>
+              <a:defRPr sz="1050">
+                <a:solidFill>
+                  <a:srgbClr val="1E293B"/>
+                </a:solidFill>
+                <a:latin typeface="Calibri"/>
+              </a:defRPr>
+            </a:pPr>
           </a:p>
           <a:p>
             <a:pPr>
               <a:spcAft>
                 <a:spcPts val="400"/>
               </a:spcAft>
-              <a:defRPr sz="1100">
-                <a:solidFill>
-                  <a:srgbClr val="1E293B"/>
-                </a:solidFill>
-                <a:latin typeface="Calibri"/>
-              </a:defRPr>
-            </a:pPr>
-            <a:r>
-              <a:t>   tenure + pass + ≤3 gaps)</a:t>
+              <a:defRPr sz="1050">
+                <a:solidFill>
+                  <a:srgbClr val="1E293B"/>
+                </a:solidFill>
+                <a:latin typeface="Calibri"/>
+              </a:defRPr>
+            </a:pPr>
+            <a:r>
+              <a:t>• low_performers</a:t>
             </a:r>
           </a:p>
           <a:p>
@@ -12385,15 +13047,15 @@
               <a:spcAft>
                 <a:spcPts val="400"/>
               </a:spcAft>
-              <a:defRPr sz="1100">
-                <a:solidFill>
-                  <a:srgbClr val="1E293B"/>
-                </a:solidFill>
-                <a:latin typeface="Calibri"/>
-              </a:defRPr>
-            </a:pPr>
-            <a:r>
-              <a:t>• list gap cells per person</a:t>
+              <a:defRPr sz="1050">
+                <a:solidFill>
+                  <a:srgbClr val="1E293B"/>
+                </a:solidFill>
+                <a:latin typeface="Calibri"/>
+              </a:defRPr>
+            </a:pPr>
+            <a:r>
+              <a:t>   combined_competency &lt; 0.50</a:t>
             </a:r>
           </a:p>
           <a:p>
@@ -12401,7 +13063,7 @@
               <a:spcAft>
                 <a:spcPts val="400"/>
               </a:spcAft>
-              <a:defRPr sz="1100">
+              <a:defRPr sz="1050">
                 <a:solidFill>
                   <a:srgbClr val="1E293B"/>
                 </a:solidFill>
@@ -12414,15 +13076,15 @@
               <a:spcAft>
                 <a:spcPts val="400"/>
               </a:spcAft>
-              <a:defRPr sz="1100">
-                <a:solidFill>
-                  <a:srgbClr val="1E293B"/>
-                </a:solidFill>
-                <a:latin typeface="Calibri"/>
-              </a:defRPr>
-            </a:pPr>
-            <a:r>
-              <a:t>ANSWERS:</a:t>
+              <a:defRPr sz="1050">
+                <a:solidFill>
+                  <a:srgbClr val="1E293B"/>
+                </a:solidFill>
+                <a:latin typeface="Calibri"/>
+              </a:defRPr>
+            </a:pPr>
+            <a:r>
+              <a:t>• promotable</a:t>
             </a:r>
           </a:p>
           <a:p>
@@ -12430,15 +13092,15 @@
               <a:spcAft>
                 <a:spcPts val="400"/>
               </a:spcAft>
-              <a:defRPr sz="1100">
-                <a:solidFill>
-                  <a:srgbClr val="1E293B"/>
-                </a:solidFill>
-                <a:latin typeface="Calibri"/>
-              </a:defRPr>
-            </a:pPr>
-            <a:r>
-              <a:t>• Critical gap individuals?</a:t>
+              <a:defRPr sz="1050">
+                <a:solidFill>
+                  <a:srgbClr val="1E293B"/>
+                </a:solidFill>
+                <a:latin typeface="Calibri"/>
+              </a:defRPr>
+            </a:pPr>
+            <a:r>
+              <a:t>   combined ≥ 0.75</a:t>
             </a:r>
           </a:p>
           <a:p>
@@ -12446,15 +13108,15 @@
               <a:spcAft>
                 <a:spcPts val="400"/>
               </a:spcAft>
-              <a:defRPr sz="1100">
-                <a:solidFill>
-                  <a:srgbClr val="1E293B"/>
-                </a:solidFill>
-                <a:latin typeface="Calibri"/>
-              </a:defRPr>
-            </a:pPr>
-            <a:r>
-              <a:t>• Who is promotable?</a:t>
+              <a:defRPr sz="1050">
+                <a:solidFill>
+                  <a:srgbClr val="1E293B"/>
+                </a:solidFill>
+                <a:latin typeface="Calibri"/>
+              </a:defRPr>
+            </a:pPr>
+            <a:r>
+              <a:t>   AND tenure_readiness ≥ 1.0</a:t>
             </a:r>
           </a:p>
           <a:p>
@@ -12462,15 +13124,15 @@
               <a:spcAft>
                 <a:spcPts val="400"/>
               </a:spcAft>
-              <a:defRPr sz="1100">
-                <a:solidFill>
-                  <a:srgbClr val="1E293B"/>
-                </a:solidFill>
-                <a:latin typeface="Calibri"/>
-              </a:defRPr>
-            </a:pPr>
-            <a:r>
-              <a:t>• Gaps before promotion?</a:t>
+              <a:defRPr sz="1050">
+                <a:solidFill>
+                  <a:srgbClr val="1E293B"/>
+                </a:solidFill>
+                <a:latin typeface="Calibri"/>
+              </a:defRPr>
+            </a:pPr>
+            <a:r>
+              <a:t>   AND passed_tpcp = 'Y'</a:t>
             </a:r>
           </a:p>
           <a:p>
@@ -12478,15 +13140,182 @@
               <a:spcAft>
                 <a:spcPts val="400"/>
               </a:spcAft>
-              <a:defRPr sz="1100">
-                <a:solidFill>
-                  <a:srgbClr val="1E293B"/>
-                </a:solidFill>
-                <a:latin typeface="Calibri"/>
-              </a:defRPr>
-            </a:pPr>
-            <a:r>
-              <a:t>• Move to critical role?</a:t>
+              <a:defRPr sz="1050">
+                <a:solidFill>
+                  <a:srgbClr val="1E293B"/>
+                </a:solidFill>
+                <a:latin typeface="Calibri"/>
+              </a:defRPr>
+            </a:pPr>
+            <a:r>
+              <a:t>   AND grade_fit ∈ {0.5, 1.0}</a:t>
+            </a:r>
+          </a:p>
+          <a:p>
+            <a:pPr>
+              <a:spcAft>
+                <a:spcPts val="400"/>
+              </a:spcAft>
+              <a:defRPr sz="1050">
+                <a:solidFill>
+                  <a:srgbClr val="1E293B"/>
+                </a:solidFill>
+                <a:latin typeface="Calibri"/>
+              </a:defRPr>
+            </a:pPr>
+          </a:p>
+          <a:p>
+            <a:pPr>
+              <a:spcAft>
+                <a:spcPts val="400"/>
+              </a:spcAft>
+              <a:defRPr sz="1050">
+                <a:solidFill>
+                  <a:srgbClr val="1E293B"/>
+                </a:solidFill>
+                <a:latin typeface="Calibri"/>
+              </a:defRPr>
+            </a:pPr>
+            <a:r>
+              <a:t>• close_in_6m</a:t>
+            </a:r>
+          </a:p>
+          <a:p>
+            <a:pPr>
+              <a:spcAft>
+                <a:spcPts val="400"/>
+              </a:spcAft>
+              <a:defRPr sz="1050">
+                <a:solidFill>
+                  <a:srgbClr val="1E293B"/>
+                </a:solidFill>
+                <a:latin typeface="Calibri"/>
+              </a:defRPr>
+            </a:pPr>
+            <a:r>
+              <a:t>   0.65 ≤ combined &lt; 0.75</a:t>
+            </a:r>
+          </a:p>
+          <a:p>
+            <a:pPr>
+              <a:spcAft>
+                <a:spcPts val="400"/>
+              </a:spcAft>
+              <a:defRPr sz="1050">
+                <a:solidFill>
+                  <a:srgbClr val="1E293B"/>
+                </a:solidFill>
+                <a:latin typeface="Calibri"/>
+              </a:defRPr>
+            </a:pPr>
+          </a:p>
+          <a:p>
+            <a:pPr>
+              <a:spcAft>
+                <a:spcPts val="400"/>
+              </a:spcAft>
+              <a:defRPr sz="1050">
+                <a:solidFill>
+                  <a:srgbClr val="1E293B"/>
+                </a:solidFill>
+                <a:latin typeface="Calibri"/>
+              </a:defRPr>
+            </a:pPr>
+            <a:r>
+              <a:t>• not_assessed</a:t>
+            </a:r>
+          </a:p>
+          <a:p>
+            <a:pPr>
+              <a:spcAft>
+                <a:spcPts val="400"/>
+              </a:spcAft>
+              <a:defRPr sz="1050">
+                <a:solidFill>
+                  <a:srgbClr val="1E293B"/>
+                </a:solidFill>
+                <a:latin typeface="Calibri"/>
+              </a:defRPr>
+            </a:pPr>
+            <a:r>
+              <a:t>   has_tpcp = false</a:t>
+            </a:r>
+          </a:p>
+          <a:p>
+            <a:pPr>
+              <a:spcAft>
+                <a:spcPts val="400"/>
+              </a:spcAft>
+              <a:defRPr sz="1050">
+                <a:solidFill>
+                  <a:srgbClr val="1E293B"/>
+                </a:solidFill>
+                <a:latin typeface="Calibri"/>
+              </a:defRPr>
+            </a:pPr>
+          </a:p>
+          <a:p>
+            <a:pPr>
+              <a:spcAft>
+                <a:spcPts val="400"/>
+              </a:spcAft>
+              <a:defRPr sz="1050">
+                <a:solidFill>
+                  <a:srgbClr val="1E293B"/>
+                </a:solidFill>
+                <a:latin typeface="Calibri"/>
+              </a:defRPr>
+            </a:pPr>
+            <a:r>
+              <a:t>ANSWERS:</a:t>
+            </a:r>
+          </a:p>
+          <a:p>
+            <a:pPr>
+              <a:spcAft>
+                <a:spcPts val="400"/>
+              </a:spcAft>
+              <a:defRPr sz="1050">
+                <a:solidFill>
+                  <a:srgbClr val="1E293B"/>
+                </a:solidFill>
+                <a:latin typeface="Calibri"/>
+              </a:defRPr>
+            </a:pPr>
+            <a:r>
+              <a:t>• Who is promotable?</a:t>
+            </a:r>
+          </a:p>
+          <a:p>
+            <a:pPr>
+              <a:spcAft>
+                <a:spcPts val="400"/>
+              </a:spcAft>
+              <a:defRPr sz="1050">
+                <a:solidFill>
+                  <a:srgbClr val="1E293B"/>
+                </a:solidFill>
+                <a:latin typeface="Calibri"/>
+              </a:defRPr>
+            </a:pPr>
+            <a:r>
+              <a:t>• Who are the low performers?</a:t>
+            </a:r>
+          </a:p>
+          <a:p>
+            <a:pPr>
+              <a:spcAft>
+                <a:spcPts val="400"/>
+              </a:spcAft>
+              <a:defRPr sz="1050">
+                <a:solidFill>
+                  <a:srgbClr val="1E293B"/>
+                </a:solidFill>
+                <a:latin typeface="Calibri"/>
+              </a:defRPr>
+            </a:pPr>
+            <a:r>
+              <a:t>• Who is close in 6 months?</a:t>
             </a:r>
           </a:p>
         </p:txBody>
@@ -12548,7 +13377,7 @@
               </a:defRPr>
             </a:pPr>
             <a:r>
-              <a:t>Insight Engine — From Scores to Actions</a:t>
+              <a:t>Engine Response — The JSON Contract</a:t>
             </a:r>
           </a:p>
         </p:txBody>
@@ -12584,7 +13413,7 @@
               </a:defRPr>
             </a:pPr>
             <a:r>
-              <a:t>Stage 4 turns numbers into 'what to do' via rule-based triage</a:t>
+              <a:t>One structured document per query — no prose, only enumerated tokens and numbers</a:t>
             </a:r>
           </a:p>
         </p:txBody>
@@ -12641,297 +13470,7 @@
         <p:spPr>
           <a:xfrm>
             <a:off x="365760" y="1554480"/>
-            <a:ext cx="2926080" cy="4846320"/>
-          </a:xfrm>
-          <a:prstGeom prst="roundRect">
-            <a:avLst/>
-          </a:prstGeom>
-          <a:solidFill>
-            <a:srgbClr val="F1F5F9"/>
-          </a:solidFill>
-          <a:ln w="15875">
-            <a:solidFill>
-              <a:srgbClr val="64748B"/>
-            </a:solidFill>
-          </a:ln>
-        </p:spPr>
-        <p:style>
-          <a:lnRef idx="1">
-            <a:schemeClr val="accent1"/>
-          </a:lnRef>
-          <a:fillRef idx="3">
-            <a:schemeClr val="accent1"/>
-          </a:fillRef>
-          <a:effectRef idx="2">
-            <a:schemeClr val="accent1"/>
-          </a:effectRef>
-          <a:fontRef idx="minor">
-            <a:schemeClr val="lt1"/>
-          </a:fontRef>
-        </p:style>
-        <p:txBody>
-          <a:bodyPr rtlCol="0" anchor="ctr"/>
-          <a:lstStyle/>
-          <a:p>
-            <a:pPr algn="ctr"/>
-          </a:p>
-        </p:txBody>
-      </p:sp>
-      <p:sp>
-        <p:nvSpPr>
-          <p:cNvPr id="6" name="TextBox 5"/>
-          <p:cNvSpPr txBox="1"/>
-          <p:nvPr/>
-        </p:nvSpPr>
-        <p:spPr>
-          <a:xfrm>
-            <a:off x="502920" y="1645920"/>
-            <a:ext cx="2743200" cy="365760"/>
-          </a:xfrm>
-          <a:prstGeom prst="rect">
-            <a:avLst/>
-          </a:prstGeom>
-          <a:noFill/>
-        </p:spPr>
-        <p:txBody>
-          <a:bodyPr wrap="square">
-            <a:spAutoFit/>
-          </a:bodyPr>
-          <a:lstStyle/>
-          <a:p>
-            <a:pPr algn="l">
-              <a:defRPr sz="1300" b="1">
-                <a:solidFill>
-                  <a:srgbClr val="1E293B"/>
-                </a:solidFill>
-                <a:latin typeface="Calibri"/>
-              </a:defRPr>
-            </a:pPr>
-            <a:r>
-              <a:t>INPUT TO TRIAGE</a:t>
-            </a:r>
-          </a:p>
-        </p:txBody>
-      </p:sp>
-      <p:sp>
-        <p:nvSpPr>
-          <p:cNvPr id="7" name="TextBox 6"/>
-          <p:cNvSpPr txBox="1"/>
-          <p:nvPr/>
-        </p:nvSpPr>
-        <p:spPr>
-          <a:xfrm>
-            <a:off x="502920" y="2103120"/>
-            <a:ext cx="2743200" cy="4206240"/>
-          </a:xfrm>
-          <a:prstGeom prst="rect">
-            <a:avLst/>
-          </a:prstGeom>
-          <a:noFill/>
-        </p:spPr>
-        <p:txBody>
-          <a:bodyPr wrap="square">
-            <a:spAutoFit/>
-          </a:bodyPr>
-          <a:lstStyle/>
-          <a:p>
-            <a:pPr>
-              <a:spcAft>
-                <a:spcPts val="400"/>
-              </a:spcAft>
-              <a:defRPr sz="1100">
-                <a:solidFill>
-                  <a:srgbClr val="1E293B"/>
-                </a:solidFill>
-                <a:latin typeface="Calibri"/>
-              </a:defRPr>
-            </a:pPr>
-            <a:r>
-              <a:t>From Team Rollup:</a:t>
-            </a:r>
-          </a:p>
-          <a:p>
-            <a:pPr>
-              <a:spcAft>
-                <a:spcPts val="400"/>
-              </a:spcAft>
-              <a:defRPr sz="1100">
-                <a:solidFill>
-                  <a:srgbClr val="1E293B"/>
-                </a:solidFill>
-                <a:latin typeface="Calibri"/>
-              </a:defRPr>
-            </a:pPr>
-            <a:r>
-              <a:t>  • level distribution</a:t>
-            </a:r>
-          </a:p>
-          <a:p>
-            <a:pPr>
-              <a:spcAft>
-                <a:spcPts val="400"/>
-              </a:spcAft>
-              <a:defRPr sz="1100">
-                <a:solidFill>
-                  <a:srgbClr val="1E293B"/>
-                </a:solidFill>
-                <a:latin typeface="Calibri"/>
-              </a:defRPr>
-            </a:pPr>
-            <a:r>
-              <a:t>  • pass rate, avg scores</a:t>
-            </a:r>
-          </a:p>
-          <a:p>
-            <a:pPr>
-              <a:spcAft>
-                <a:spcPts val="400"/>
-              </a:spcAft>
-              <a:defRPr sz="1100">
-                <a:solidFill>
-                  <a:srgbClr val="1E293B"/>
-                </a:solidFill>
-                <a:latin typeface="Calibri"/>
-              </a:defRPr>
-            </a:pPr>
-          </a:p>
-          <a:p>
-            <a:pPr>
-              <a:spcAft>
-                <a:spcPts val="400"/>
-              </a:spcAft>
-              <a:defRPr sz="1100">
-                <a:solidFill>
-                  <a:srgbClr val="1E293B"/>
-                </a:solidFill>
-                <a:latin typeface="Calibri"/>
-              </a:defRPr>
-            </a:pPr>
-            <a:r>
-              <a:t>From Gap Matrix:</a:t>
-            </a:r>
-          </a:p>
-          <a:p>
-            <a:pPr>
-              <a:spcAft>
-                <a:spcPts val="400"/>
-              </a:spcAft>
-              <a:defRPr sz="1100">
-                <a:solidFill>
-                  <a:srgbClr val="1E293B"/>
-                </a:solidFill>
-                <a:latin typeface="Calibri"/>
-              </a:defRPr>
-            </a:pPr>
-            <a:r>
-              <a:t>  • per-cell failure rate</a:t>
-            </a:r>
-          </a:p>
-          <a:p>
-            <a:pPr>
-              <a:spcAft>
-                <a:spcPts val="400"/>
-              </a:spcAft>
-              <a:defRPr sz="1100">
-                <a:solidFill>
-                  <a:srgbClr val="1E293B"/>
-                </a:solidFill>
-                <a:latin typeface="Calibri"/>
-              </a:defRPr>
-            </a:pPr>
-            <a:r>
-              <a:t>  • structural / mixed / people</a:t>
-            </a:r>
-          </a:p>
-          <a:p>
-            <a:pPr>
-              <a:spcAft>
-                <a:spcPts val="400"/>
-              </a:spcAft>
-              <a:defRPr sz="1100">
-                <a:solidFill>
-                  <a:srgbClr val="1E293B"/>
-                </a:solidFill>
-                <a:latin typeface="Calibri"/>
-              </a:defRPr>
-            </a:pPr>
-          </a:p>
-          <a:p>
-            <a:pPr>
-              <a:spcAft>
-                <a:spcPts val="400"/>
-              </a:spcAft>
-              <a:defRPr sz="1100">
-                <a:solidFill>
-                  <a:srgbClr val="1E293B"/>
-                </a:solidFill>
-                <a:latin typeface="Calibri"/>
-              </a:defRPr>
-            </a:pPr>
-            <a:r>
-              <a:t>From Individual Drill-Down:</a:t>
-            </a:r>
-          </a:p>
-          <a:p>
-            <a:pPr>
-              <a:spcAft>
-                <a:spcPts val="400"/>
-              </a:spcAft>
-              <a:defRPr sz="1100">
-                <a:solidFill>
-                  <a:srgbClr val="1E293B"/>
-                </a:solidFill>
-                <a:latin typeface="Calibri"/>
-              </a:defRPr>
-            </a:pPr>
-            <a:r>
-              <a:t>  • flagged low performers</a:t>
-            </a:r>
-          </a:p>
-          <a:p>
-            <a:pPr>
-              <a:spcAft>
-                <a:spcPts val="400"/>
-              </a:spcAft>
-              <a:defRPr sz="1100">
-                <a:solidFill>
-                  <a:srgbClr val="1E293B"/>
-                </a:solidFill>
-                <a:latin typeface="Calibri"/>
-              </a:defRPr>
-            </a:pPr>
-            <a:r>
-              <a:t>  • promotable candidates</a:t>
-            </a:r>
-          </a:p>
-          <a:p>
-            <a:pPr>
-              <a:spcAft>
-                <a:spcPts val="400"/>
-              </a:spcAft>
-              <a:defRPr sz="1100">
-                <a:solidFill>
-                  <a:srgbClr val="1E293B"/>
-                </a:solidFill>
-                <a:latin typeface="Calibri"/>
-              </a:defRPr>
-            </a:pPr>
-            <a:r>
-              <a:t>  • personal gap lists</a:t>
-            </a:r>
-          </a:p>
-        </p:txBody>
-      </p:sp>
-      <p:sp>
-        <p:nvSpPr>
-          <p:cNvPr id="8" name="Rounded Rectangle 7"/>
-          <p:cNvSpPr/>
-          <p:nvPr/>
-        </p:nvSpPr>
-        <p:spPr>
-          <a:xfrm>
-            <a:off x="3657600" y="1554480"/>
-            <a:ext cx="4572000" cy="4846320"/>
+            <a:ext cx="3840480" cy="4846320"/>
           </a:xfrm>
           <a:prstGeom prst="roundRect">
             <a:avLst/>
@@ -12969,14 +13508,14 @@
       </p:sp>
       <p:sp>
         <p:nvSpPr>
-          <p:cNvPr id="9" name="TextBox 8"/>
+          <p:cNvPr id="6" name="TextBox 5"/>
           <p:cNvSpPr txBox="1"/>
           <p:nvPr/>
         </p:nvSpPr>
         <p:spPr>
           <a:xfrm>
-            <a:off x="3794760" y="1645920"/>
-            <a:ext cx="4297680" cy="365760"/>
+            <a:off x="548640" y="1645920"/>
+            <a:ext cx="3566160" cy="365760"/>
           </a:xfrm>
           <a:prstGeom prst="rect">
             <a:avLst/>
@@ -12998,21 +13537,21 @@
               </a:defRPr>
             </a:pPr>
             <a:r>
-              <a:t>DECISION RULES</a:t>
-            </a:r>
-          </a:p>
-        </p:txBody>
-      </p:sp>
-      <p:sp>
-        <p:nvSpPr>
-          <p:cNvPr id="10" name="TextBox 9"/>
+              <a:t>TOP-LEVEL FIELDS</a:t>
+            </a:r>
+          </a:p>
+        </p:txBody>
+      </p:sp>
+      <p:sp>
+        <p:nvSpPr>
+          <p:cNvPr id="7" name="TextBox 6"/>
           <p:cNvSpPr txBox="1"/>
           <p:nvPr/>
         </p:nvSpPr>
         <p:spPr>
           <a:xfrm>
-            <a:off x="3794760" y="2103120"/>
-            <a:ext cx="4297680" cy="4206240"/>
+            <a:off x="548640" y="2103120"/>
+            <a:ext cx="3566160" cy="4206240"/>
           </a:xfrm>
           <a:prstGeom prst="rect">
             <a:avLst/>
@@ -13026,97 +13565,321 @@
           <a:lstStyle/>
           <a:p>
             <a:pPr>
-              <a:defRPr sz="1050">
-                <a:solidFill>
-                  <a:srgbClr val="1E293B"/>
-                </a:solidFill>
-                <a:latin typeface="Consolas"/>
-              </a:defRPr>
-            </a:pPr>
-            <a:r>
-              <a:t>IF cell.fail_rate ≥ 60%</a:t>
-            </a:r>
-            <a:br/>
-            <a:r>
-              <a:t>   AND cell ∈ (Base, Key)</a:t>
-            </a:r>
-            <a:br/>
-            <a:r>
-              <a:t>   → action = TRAINING (priority: high)</a:t>
-            </a:r>
-            <a:br/>
-            <a:br/>
-            <a:r>
-              <a:t>IF cell.fail_rate 20–60%</a:t>
-            </a:r>
-            <a:br/>
-            <a:r>
-              <a:t>   AND cell ∈ (Pacing, Emerging)</a:t>
-            </a:r>
-            <a:br/>
-            <a:r>
-              <a:t>   → action = EXPOSURE (targeted)</a:t>
-            </a:r>
-            <a:br/>
-            <a:br/>
-            <a:r>
-              <a:t>IF level_distribution.principals /</a:t>
-            </a:r>
-            <a:br/>
-            <a:r>
-              <a:t>   team_size &lt; benchmark</a:t>
-            </a:r>
-            <a:br/>
-            <a:r>
-              <a:t>   AND no internal upgrade path</a:t>
-            </a:r>
-            <a:br/>
-            <a:r>
-              <a:t>   → action = HIRING</a:t>
-            </a:r>
-            <a:br/>
-            <a:br/>
-            <a:r>
-              <a:t>IF individual.combined ≥ 0.75</a:t>
-            </a:r>
-            <a:br/>
-            <a:r>
-              <a:t>   AND tenure_ready ≥ 1.0</a:t>
-            </a:r>
-            <a:br/>
-            <a:r>
-              <a:t>   AND passed_tpcp = 'Y'</a:t>
-            </a:r>
-            <a:br/>
-            <a:r>
-              <a:t>   AND gap_count ≤ 3</a:t>
-            </a:r>
-            <a:br/>
-            <a:r>
-              <a:t>   → promotable = true</a:t>
-            </a:r>
-            <a:br/>
-            <a:br/>
-            <a:r>
-              <a:t>IF individual.combined 0.65–0.74</a:t>
-            </a:r>
-            <a:br/>
-            <a:r>
-              <a:t>   → close_in_6m: list gaps at level 2</a:t>
-            </a:r>
-          </a:p>
-        </p:txBody>
-      </p:sp>
-      <p:sp>
-        <p:nvSpPr>
-          <p:cNvPr id="11" name="Rounded Rectangle 10"/>
+              <a:spcAft>
+                <a:spcPts val="400"/>
+              </a:spcAft>
+              <a:defRPr sz="1100">
+                <a:solidFill>
+                  <a:srgbClr val="1E293B"/>
+                </a:solidFill>
+                <a:latin typeface="Calibri"/>
+              </a:defRPr>
+            </a:pPr>
+            <a:r>
+              <a:t>• scope</a:t>
+            </a:r>
+          </a:p>
+          <a:p>
+            <a:pPr>
+              <a:spcAft>
+                <a:spcPts val="400"/>
+              </a:spcAft>
+              <a:defRPr sz="1100">
+                <a:solidFill>
+                  <a:srgbClr val="1E293B"/>
+                </a:solidFill>
+                <a:latin typeface="Calibri"/>
+              </a:defRPr>
+            </a:pPr>
+            <a:r>
+              <a:t>    business, opu, division, team_size</a:t>
+            </a:r>
+          </a:p>
+          <a:p>
+            <a:pPr>
+              <a:spcAft>
+                <a:spcPts val="400"/>
+              </a:spcAft>
+              <a:defRPr sz="1100">
+                <a:solidFill>
+                  <a:srgbClr val="1E293B"/>
+                </a:solidFill>
+                <a:latin typeface="Calibri"/>
+              </a:defRPr>
+            </a:pPr>
+          </a:p>
+          <a:p>
+            <a:pPr>
+              <a:spcAft>
+                <a:spcPts val="400"/>
+              </a:spcAft>
+              <a:defRPr sz="1100">
+                <a:solidFill>
+                  <a:srgbClr val="1E293B"/>
+                </a:solidFill>
+                <a:latin typeface="Calibri"/>
+              </a:defRPr>
+            </a:pPr>
+            <a:r>
+              <a:t>• join_summary</a:t>
+            </a:r>
+          </a:p>
+          <a:p>
+            <a:pPr>
+              <a:spcAft>
+                <a:spcPts val="400"/>
+              </a:spcAft>
+              <a:defRPr sz="1100">
+                <a:solidFill>
+                  <a:srgbClr val="1E293B"/>
+                </a:solidFill>
+                <a:latin typeface="Calibri"/>
+              </a:defRPr>
+            </a:pPr>
+            <a:r>
+              <a:t>    both / hris_only / tpcp_only counts</a:t>
+            </a:r>
+          </a:p>
+          <a:p>
+            <a:pPr>
+              <a:spcAft>
+                <a:spcPts val="400"/>
+              </a:spcAft>
+              <a:defRPr sz="1100">
+                <a:solidFill>
+                  <a:srgbClr val="1E293B"/>
+                </a:solidFill>
+                <a:latin typeface="Calibri"/>
+              </a:defRPr>
+            </a:pPr>
+          </a:p>
+          <a:p>
+            <a:pPr>
+              <a:spcAft>
+                <a:spcPts val="400"/>
+              </a:spcAft>
+              <a:defRPr sz="1100">
+                <a:solidFill>
+                  <a:srgbClr val="1E293B"/>
+                </a:solidFill>
+                <a:latin typeface="Calibri"/>
+              </a:defRPr>
+            </a:pPr>
+            <a:r>
+              <a:t>• team_aggregate</a:t>
+            </a:r>
+          </a:p>
+          <a:p>
+            <a:pPr>
+              <a:spcAft>
+                <a:spcPts val="400"/>
+              </a:spcAft>
+              <a:defRPr sz="1100">
+                <a:solidFill>
+                  <a:srgbClr val="1E293B"/>
+                </a:solidFill>
+                <a:latin typeface="Calibri"/>
+              </a:defRPr>
+            </a:pPr>
+            <a:r>
+              <a:t>    pass_rate, level_distribution,</a:t>
+            </a:r>
+          </a:p>
+          <a:p>
+            <a:pPr>
+              <a:spcAft>
+                <a:spcPts val="400"/>
+              </a:spcAft>
+              <a:defRPr sz="1100">
+                <a:solidFill>
+                  <a:srgbClr val="1E293B"/>
+                </a:solidFill>
+                <a:latin typeface="Calibri"/>
+              </a:defRPr>
+            </a:pPr>
+            <a:r>
+              <a:t>    avg_combined, avg_tpcp, avg_cbs,</a:t>
+            </a:r>
+          </a:p>
+          <a:p>
+            <a:pPr>
+              <a:spcAft>
+                <a:spcPts val="400"/>
+              </a:spcAft>
+              <a:defRPr sz="1100">
+                <a:solidFill>
+                  <a:srgbClr val="1E293B"/>
+                </a:solidFill>
+                <a:latin typeface="Calibri"/>
+              </a:defRPr>
+            </a:pPr>
+            <a:r>
+              <a:t>    weakest_dimension</a:t>
+            </a:r>
+          </a:p>
+          <a:p>
+            <a:pPr>
+              <a:spcAft>
+                <a:spcPts val="400"/>
+              </a:spcAft>
+              <a:defRPr sz="1100">
+                <a:solidFill>
+                  <a:srgbClr val="1E293B"/>
+                </a:solidFill>
+                <a:latin typeface="Calibri"/>
+              </a:defRPr>
+            </a:pPr>
+          </a:p>
+          <a:p>
+            <a:pPr>
+              <a:spcAft>
+                <a:spcPts val="400"/>
+              </a:spcAft>
+              <a:defRPr sz="1100">
+                <a:solidFill>
+                  <a:srgbClr val="1E293B"/>
+                </a:solidFill>
+                <a:latin typeface="Calibri"/>
+              </a:defRPr>
+            </a:pPr>
+            <a:r>
+              <a:t>• individual_drill_down</a:t>
+            </a:r>
+          </a:p>
+          <a:p>
+            <a:pPr>
+              <a:spcAft>
+                <a:spcPts val="400"/>
+              </a:spcAft>
+              <a:defRPr sz="1100">
+                <a:solidFill>
+                  <a:srgbClr val="1E293B"/>
+                </a:solidFill>
+                <a:latin typeface="Calibri"/>
+              </a:defRPr>
+            </a:pPr>
+            <a:r>
+              <a:t>    low_performers, promotable,</a:t>
+            </a:r>
+          </a:p>
+          <a:p>
+            <a:pPr>
+              <a:spcAft>
+                <a:spcPts val="400"/>
+              </a:spcAft>
+              <a:defRPr sz="1100">
+                <a:solidFill>
+                  <a:srgbClr val="1E293B"/>
+                </a:solidFill>
+                <a:latin typeface="Calibri"/>
+              </a:defRPr>
+            </a:pPr>
+            <a:r>
+              <a:t>    close_in_6m, not_assessed</a:t>
+            </a:r>
+          </a:p>
+          <a:p>
+            <a:pPr>
+              <a:spcAft>
+                <a:spcPts val="400"/>
+              </a:spcAft>
+              <a:defRPr sz="1100">
+                <a:solidFill>
+                  <a:srgbClr val="1E293B"/>
+                </a:solidFill>
+                <a:latin typeface="Calibri"/>
+              </a:defRPr>
+            </a:pPr>
+          </a:p>
+          <a:p>
+            <a:pPr>
+              <a:spcAft>
+                <a:spcPts val="400"/>
+              </a:spcAft>
+              <a:defRPr sz="1100">
+                <a:solidFill>
+                  <a:srgbClr val="1E293B"/>
+                </a:solidFill>
+                <a:latin typeface="Calibri"/>
+              </a:defRPr>
+            </a:pPr>
+            <a:r>
+              <a:t>• employee_health[]</a:t>
+            </a:r>
+          </a:p>
+          <a:p>
+            <a:pPr>
+              <a:spcAft>
+                <a:spcPts val="400"/>
+              </a:spcAft>
+              <a:defRPr sz="1100">
+                <a:solidFill>
+                  <a:srgbClr val="1E293B"/>
+                </a:solidFill>
+                <a:latin typeface="Calibri"/>
+              </a:defRPr>
+            </a:pPr>
+            <a:r>
+              <a:t>    one 5-score vector per person</a:t>
+            </a:r>
+          </a:p>
+          <a:p>
+            <a:pPr>
+              <a:spcAft>
+                <a:spcPts val="400"/>
+              </a:spcAft>
+              <a:defRPr sz="1100">
+                <a:solidFill>
+                  <a:srgbClr val="1E293B"/>
+                </a:solidFill>
+                <a:latin typeface="Calibri"/>
+              </a:defRPr>
+            </a:pPr>
+          </a:p>
+          <a:p>
+            <a:pPr>
+              <a:spcAft>
+                <a:spcPts val="400"/>
+              </a:spcAft>
+              <a:defRPr sz="1100">
+                <a:solidFill>
+                  <a:srgbClr val="1E293B"/>
+                </a:solidFill>
+                <a:latin typeface="Calibri"/>
+              </a:defRPr>
+            </a:pPr>
+            <a:r>
+              <a:t>NO gap_matrix field</a:t>
+            </a:r>
+          </a:p>
+          <a:p>
+            <a:pPr>
+              <a:spcAft>
+                <a:spcPts val="400"/>
+              </a:spcAft>
+              <a:defRPr sz="1100">
+                <a:solidFill>
+                  <a:srgbClr val="1E293B"/>
+                </a:solidFill>
+                <a:latin typeface="Calibri"/>
+              </a:defRPr>
+            </a:pPr>
+            <a:r>
+              <a:t>NO actions field</a:t>
+            </a:r>
+          </a:p>
+        </p:txBody>
+      </p:sp>
+      <p:sp>
+        <p:nvSpPr>
+          <p:cNvPr id="8" name="Rounded Rectangle 7"/>
           <p:cNvSpPr/>
           <p:nvPr/>
         </p:nvSpPr>
         <p:spPr>
           <a:xfrm>
-            <a:off x="8595360" y="1554480"/>
-            <a:ext cx="3200400" cy="4846320"/>
+            <a:off x="4480560" y="1554480"/>
+            <a:ext cx="7315200" cy="4846320"/>
           </a:xfrm>
           <a:prstGeom prst="roundRect">
             <a:avLst/>
@@ -13154,14 +13917,14 @@
       </p:sp>
       <p:sp>
         <p:nvSpPr>
-          <p:cNvPr id="12" name="TextBox 11"/>
+          <p:cNvPr id="9" name="TextBox 8"/>
           <p:cNvSpPr txBox="1"/>
           <p:nvPr/>
         </p:nvSpPr>
         <p:spPr>
           <a:xfrm>
-            <a:off x="8732520" y="1645920"/>
-            <a:ext cx="2926080" cy="365760"/>
+            <a:off x="4617720" y="1645920"/>
+            <a:ext cx="7040880" cy="365760"/>
           </a:xfrm>
           <a:prstGeom prst="rect">
             <a:avLst/>
@@ -13183,21 +13946,21 @@
               </a:defRPr>
             </a:pPr>
             <a:r>
-              <a:t>JSON OUTPUT</a:t>
-            </a:r>
-          </a:p>
-        </p:txBody>
-      </p:sp>
-      <p:sp>
-        <p:nvSpPr>
-          <p:cNvPr id="13" name="TextBox 12"/>
+              <a:t>EXAMPLE ENGINE_RESPONSE</a:t>
+            </a:r>
+          </a:p>
+        </p:txBody>
+      </p:sp>
+      <p:sp>
+        <p:nvSpPr>
+          <p:cNvPr id="10" name="TextBox 9"/>
           <p:cNvSpPr txBox="1"/>
           <p:nvPr/>
         </p:nvSpPr>
         <p:spPr>
           <a:xfrm>
-            <a:off x="8732520" y="2103120"/>
-            <a:ext cx="2926080" cy="4206240"/>
+            <a:off x="4617720" y="2057400"/>
+            <a:ext cx="7040880" cy="4297680"/>
           </a:xfrm>
           <a:prstGeom prst="rect">
             <a:avLst/>
@@ -13211,7 +13974,7 @@
           <a:lstStyle/>
           <a:p>
             <a:pPr>
-              <a:defRPr sz="1000">
+              <a:defRPr sz="950">
                 <a:solidFill>
                   <a:srgbClr val="FFFFFF"/>
                 </a:solidFill>
@@ -13223,79 +13986,79 @@
             </a:r>
             <a:br/>
             <a:r>
-              <a:t>  "actions": [</a:t>
+              <a:t>  "scope": {"business":"Upstream","opu":"PCSB-DR","division":"Drilling","team_size":47},</a:t>
             </a:r>
             <a:br/>
             <a:r>
-              <a:t>    {</a:t>
+              <a:t>  "join_summary": {"both":42, "hris_only":4, "tpcp_only":1},</a:t>
             </a:r>
             <a:br/>
             <a:r>
-              <a:t>      "type": "training",</a:t>
+              <a:t>  "team_aggregate": {</a:t>
             </a:r>
             <a:br/>
             <a:r>
-              <a:t>      "priority": "high",</a:t>
+              <a:t>    "assessed_count":42, "not_assessed_count":5,</a:t>
             </a:r>
             <a:br/>
             <a:r>
-              <a:t>      "cell": "k3",</a:t>
+              <a:t>    "pass_rate":0.7619, "level_distribution":{"Staff":18,"Principal":20,"Custodian":4,"Not TP":0},</a:t>
             </a:r>
             <a:br/>
             <a:r>
-              <a:t>      "fail_rate": 0.68,</a:t>
+              <a:t>    "avg_combined_competency":0.68, "avg_tpcp_health":0.72, "avg_cbs_health":0.63,</a:t>
             </a:r>
             <a:br/>
             <a:r>
-              <a:t>      "horizon_months": 6,</a:t>
+              <a:t>    "weakest_dimension":"pacing"</a:t>
             </a:r>
             <a:br/>
             <a:r>
-              <a:t>      "affects": 18</a:t>
+              <a:t>  },</a:t>
             </a:r>
             <a:br/>
             <a:r>
-              <a:t>    },</a:t>
+              <a:t>  "individual_drill_down": {</a:t>
             </a:r>
             <a:br/>
             <a:r>
-              <a:t>    {</a:t>
+              <a:t>    "low_performers":[{"dummy_id":30112,"combined_competency":0.41}],</a:t>
             </a:r>
             <a:br/>
             <a:r>
-              <a:t>      "type": "exposure",</a:t>
+              <a:t>    "promotable":[{"dummy_id":23267,"combined_competency":0.77}],</a:t>
             </a:r>
             <a:br/>
             <a:r>
-              <a:t>      "priority": "medium",</a:t>
+              <a:t>    "close_in_6m":[{"dummy_id":28504,"combined_competency":0.68}],</a:t>
             </a:r>
             <a:br/>
             <a:r>
-              <a:t>      "cell": "p2",</a:t>
+              <a:t>    "not_assessed":[{"dummy_id":40301,"sma_completion_status":"N"}]</a:t>
             </a:r>
             <a:br/>
             <a:r>
-              <a:t>      "horizon_months": 9,</a:t>
+              <a:t>  },</a:t>
             </a:r>
             <a:br/>
             <a:r>
-              <a:t>      "affects": 4</a:t>
+              <a:t>  "employee_health":[</a:t>
             </a:r>
             <a:br/>
             <a:r>
-              <a:t>    }</a:t>
+              <a:t>    {"dummy_id":23267,"tpcp_health":0.87,"cbs_health":0.65,</a:t>
             </a:r>
             <a:br/>
             <a:r>
-              <a:t>  ],</a:t>
+              <a:t>     "combined_competency":0.77,"grade_fit":1.0,"tenure_readiness":1.0},</a:t>
             </a:r>
             <a:br/>
             <a:r>
-              <a:t>  "promotable_count": 3,</a:t>
+              <a:t>    ...  47 entries total</a:t>
             </a:r>
             <a:br/>
             <a:r>
-              <a:t>  "critical_gap_count": 5</a:t>
+              <a:t>  ]</a:t>
             </a:r>
             <a:br/>
             <a:r>
